--- a/public/fun/pack/pptx/review/보장점검양식_30_사업장점검_빨간우체통.pptx
+++ b/public/fun/pack/pptx/review/보장점검양식_30_사업장점검_빨간우체통.pptx
@@ -3286,6 +3286,14 @@
 <file path=ppt/slides/slide1.xml><?xml version="1.0" encoding="utf-8"?>
 <p:sld xmlns:a="http://schemas.openxmlformats.org/drawingml/2006/main" xmlns:p="http://schemas.openxmlformats.org/presentationml/2006/main" xmlns:r="http://schemas.openxmlformats.org/officeDocument/2006/relationships">
   <p:cSld>
+    <p:bg>
+      <p:bgPr>
+        <a:solidFill>
+          <a:srgbClr val="492E27"/>
+        </a:solidFill>
+        <a:effectLst/>
+      </p:bgPr>
+    </p:bg>
     <p:spTree>
       <p:nvGrpSpPr>
         <p:cNvPr id="1" name=""/>
@@ -3293,30 +3301,102 @@
         <p:nvPr/>
       </p:nvGrpSpPr>
       <p:grpSpPr/>
-      <p:pic>
-        <p:nvPicPr>
-          <p:cNvPr id="3" name="표지 그림" descr="review-30.jpg"/>
-          <p:cNvPicPr>
-            <a:picLocks noChangeAspect="1"/>
-          </p:cNvPicPr>
+      <p:sp>
+        <p:nvSpPr>
+          <p:cNvPr id="3" name="장식"/>
+          <p:cNvSpPr/>
           <p:nvPr/>
-        </p:nvPicPr>
-        <p:blipFill>
-          <a:blip r:embed="rId2"/>
-          <a:stretch>
-            <a:fillRect/>
-          </a:stretch>
-        </p:blipFill>
-        <p:spPr>
-          <a:xfrm>
-            <a:off x="0" y="0"/>
-            <a:ext cx="12191695" cy="6858000"/>
+        </p:nvSpPr>
+        <p:spPr>
+          <a:xfrm>
+            <a:off x="7071183" y="-3200400"/>
+            <a:ext cx="6400800" cy="6400800"/>
+          </a:xfrm>
+          <a:prstGeom prst="ellipse">
+            <a:avLst/>
+          </a:prstGeom>
+          <a:solidFill>
+            <a:srgbClr val="A66B5C"/>
+          </a:solidFill>
+          <a:ln>
+            <a:noFill/>
+          </a:ln>
+        </p:spPr>
+        <p:txBody>
+          <a:bodyPr rtlCol="0" anchor="ctr"/>
+          <a:lstStyle/>
+          <a:p>
+            <a:pPr algn="ctr"/>
+          </a:p>
+        </p:txBody>
+      </p:sp>
+      <p:sp>
+        <p:nvSpPr>
+          <p:cNvPr id="4" name="장식"/>
+          <p:cNvSpPr/>
+          <p:nvPr/>
+        </p:nvSpPr>
+        <p:spPr>
+          <a:xfrm>
+            <a:off x="8534186" y="-914400"/>
+            <a:ext cx="3291840" cy="3291840"/>
+          </a:xfrm>
+          <a:prstGeom prst="ellipse">
+            <a:avLst/>
+          </a:prstGeom>
+          <a:solidFill>
+            <a:srgbClr val="D88C79"/>
+          </a:solidFill>
+          <a:ln>
+            <a:noFill/>
+          </a:ln>
+        </p:spPr>
+        <p:txBody>
+          <a:bodyPr rtlCol="0" anchor="ctr"/>
+          <a:lstStyle/>
+          <a:p>
+            <a:pPr algn="ctr"/>
+          </a:p>
+        </p:txBody>
+      </p:sp>
+      <p:sp>
+        <p:nvSpPr>
+          <p:cNvPr id="5" name="라벨"/>
+          <p:cNvSpPr txBox="1"/>
+          <p:nvPr/>
+        </p:nvSpPr>
+        <p:spPr>
+          <a:xfrm>
+            <a:off x="822960" y="2148840"/>
+            <a:ext cx="5608179" cy="274320"/>
           </a:xfrm>
           <a:prstGeom prst="rect">
             <a:avLst/>
           </a:prstGeom>
-        </p:spPr>
-      </p:pic>
+          <a:noFill/>
+        </p:spPr>
+        <p:txBody>
+          <a:bodyPr wrap="square" lIns="54864" rIns="54864" tIns="27432" bIns="27432" anchor="t">
+            <a:noAutofit/>
+          </a:bodyPr>
+          <a:lstStyle/>
+          <a:p>
+            <a:pPr algn="l">
+              <a:lnSpc>
+                <a:spcPct val="115000"/>
+              </a:lnSpc>
+            </a:pPr>
+            <a:r>
+              <a:rPr sz="1000" b="1" i="0" spc="250">
+                <a:solidFill>
+                  <a:srgbClr val="FFFFFF"/>
+                </a:solidFill>
+              </a:rPr>
+              <a:t>INSURANCE CHECK</a:t>
+            </a:r>
+          </a:p>
+        </p:txBody>
+      </p:sp>
       <p:sp>
         <p:nvSpPr>
           <p:cNvPr id="2" name="Title 1"/>
@@ -3329,8 +3409,8 @@
         </p:nvSpPr>
         <p:spPr>
           <a:xfrm>
-            <a:off x="853418" y="2057400"/>
-            <a:ext cx="6095847" cy="1554480"/>
+            <a:off x="822960" y="2606040"/>
+            <a:ext cx="5608179" cy="1188720"/>
           </a:xfrm>
         </p:spPr>
         <p:txBody>
@@ -3347,7 +3427,7 @@
             <a:r>
               <a:rPr sz="3600" b="1" i="0">
                 <a:solidFill>
-                  <a:srgbClr val="5B2315"/>
+                  <a:srgbClr val="FFFFFF"/>
                 </a:solidFill>
               </a:rPr>
               <a:t>우리 보험 점검 시간</a:t>
@@ -3357,14 +3437,14 @@
       </p:sp>
       <p:sp>
         <p:nvSpPr>
-          <p:cNvPr id="4" name="한 줄 문구"/>
+          <p:cNvPr id="6" name="한 줄 문구"/>
           <p:cNvSpPr txBox="1"/>
           <p:nvPr/>
         </p:nvSpPr>
         <p:spPr>
           <a:xfrm>
-            <a:off x="853418" y="3749039"/>
-            <a:ext cx="6095847" cy="822960"/>
+            <a:off x="822960" y="3886200"/>
+            <a:ext cx="5608179" cy="822960"/>
           </a:xfrm>
           <a:prstGeom prst="rect">
             <a:avLst/>
@@ -3383,9 +3463,9 @@
               </a:lnSpc>
             </a:pPr>
             <a:r>
-              <a:rPr sz="1700" b="0" i="1">
+              <a:rPr sz="1700" b="0" i="0">
                 <a:solidFill>
-                  <a:srgbClr val="5B2315"/>
+                  <a:srgbClr val="FFFFFF"/>
                 </a:solidFill>
               </a:rPr>
               <a:t>만기가 가까운 것부터 봅니다</a:t>
@@ -3395,14 +3475,14 @@
       </p:sp>
       <p:sp>
         <p:nvSpPr>
-          <p:cNvPr id="5" name="안내 문구"/>
+          <p:cNvPr id="7" name="안내 문구"/>
           <p:cNvSpPr txBox="1"/>
           <p:nvPr/>
         </p:nvSpPr>
         <p:spPr>
           <a:xfrm>
-            <a:off x="853418" y="4617720"/>
-            <a:ext cx="6095847" cy="914400"/>
+            <a:off x="822960" y="4754880"/>
+            <a:ext cx="5608179" cy="914400"/>
           </a:xfrm>
           <a:prstGeom prst="rect">
             <a:avLst/>
@@ -3423,10 +3503,10 @@
             <a:r>
               <a:rPr sz="1400" b="0" i="0">
                 <a:solidFill>
-                  <a:srgbClr val="666666"/>
+                  <a:srgbClr val="FFFFFF"/>
                 </a:solidFill>
               </a:rPr>
-              <a:t>사업장 점검 · 2027. 00. 00</a:t>
+              <a:t>사업장 점검 · 날짜 입력</a:t>
             </a:r>
           </a:p>
           <a:p>
@@ -3438,7 +3518,7 @@
             <a:r>
               <a:rPr sz="1400" b="0" i="0">
                 <a:solidFill>
-                  <a:srgbClr val="666666"/>
+                  <a:srgbClr val="FFFFFF"/>
                 </a:solidFill>
               </a:rPr>
               <a:t>가입 내용을 정리하고 함께 확인하는 양식</a:t>
@@ -3460,7 +3540,7 @@
     <p:bg>
       <p:bgPr>
         <a:solidFill>
-          <a:srgbClr val="FBF1EE"/>
+          <a:srgbClr val="FBEFEC"/>
         </a:solidFill>
         <a:effectLst/>
       </p:bgPr>
@@ -3479,18 +3559,82 @@
           <p:nvPr/>
         </p:nvSpPr>
         <p:spPr>
-          <a:xfrm rot="10800000">
-            <a:off x="10637215" y="0"/>
-            <a:ext cx="914400" cy="1554480"/>
-          </a:xfrm>
-          <a:prstGeom prst="round2SameRect">
-            <a:avLst>
-              <a:gd name="adj1" fmla="val 50000"/>
-              <a:gd name="adj2" fmla="val 0"/>
-            </a:avLst>
+          <a:xfrm>
+            <a:off x="10180015" y="-1645920"/>
+            <a:ext cx="3474720" cy="3474720"/>
+          </a:xfrm>
+          <a:prstGeom prst="ellipse">
+            <a:avLst/>
           </a:prstGeom>
           <a:solidFill>
-            <a:srgbClr val="F5D4CC"/>
+            <a:srgbClr val="EBBAAD"/>
+          </a:solidFill>
+          <a:ln>
+            <a:noFill/>
+          </a:ln>
+        </p:spPr>
+        <p:txBody>
+          <a:bodyPr rtlCol="0" anchor="ctr"/>
+          <a:lstStyle/>
+          <a:p>
+            <a:pPr algn="ctr"/>
+          </a:p>
+        </p:txBody>
+      </p:sp>
+      <p:sp>
+        <p:nvSpPr>
+          <p:cNvPr id="4" name="상단 라벨"/>
+          <p:cNvSpPr txBox="1"/>
+          <p:nvPr/>
+        </p:nvSpPr>
+        <p:spPr>
+          <a:xfrm>
+            <a:off x="640080" y="274320"/>
+            <a:ext cx="5486400" cy="274320"/>
+          </a:xfrm>
+          <a:prstGeom prst="rect">
+            <a:avLst/>
+          </a:prstGeom>
+          <a:noFill/>
+        </p:spPr>
+        <p:txBody>
+          <a:bodyPr wrap="square" lIns="54864" rIns="54864" tIns="27432" bIns="27432" anchor="ctr">
+            <a:noAutofit/>
+          </a:bodyPr>
+          <a:lstStyle/>
+          <a:p>
+            <a:pPr algn="l">
+              <a:lnSpc>
+                <a:spcPct val="115000"/>
+              </a:lnSpc>
+            </a:pPr>
+            <a:r>
+              <a:rPr sz="900" b="1" i="0" spc="250">
+                <a:solidFill>
+                  <a:srgbClr val="26231F"/>
+                </a:solidFill>
+              </a:rPr>
+              <a:t>INSURANCE CHECK</a:t>
+            </a:r>
+          </a:p>
+        </p:txBody>
+      </p:sp>
+      <p:sp>
+        <p:nvSpPr>
+          <p:cNvPr id="5" name="포인트"/>
+          <p:cNvSpPr/>
+          <p:nvPr/>
+        </p:nvSpPr>
+        <p:spPr>
+          <a:xfrm>
+            <a:off x="11048695" y="502919"/>
+            <a:ext cx="274320" cy="274320"/>
+          </a:xfrm>
+          <a:prstGeom prst="donut">
+            <a:avLst/>
+          </a:prstGeom>
+          <a:solidFill>
+            <a:srgbClr val="FFFFFF"/>
           </a:solidFill>
           <a:ln>
             <a:noFill/>
@@ -3516,8 +3660,8 @@
         </p:nvSpPr>
         <p:spPr>
           <a:xfrm>
-            <a:off x="640080" y="457200"/>
-            <a:ext cx="9722815" cy="868680"/>
+            <a:off x="640080" y="658368"/>
+            <a:ext cx="9082735" cy="868680"/>
           </a:xfrm>
         </p:spPr>
         <p:txBody>
@@ -3534,7 +3678,7 @@
             <a:r>
               <a:rPr sz="3000" b="1" i="0">
                 <a:solidFill>
-                  <a:srgbClr val="5B2315"/>
+                  <a:srgbClr val="26231F"/>
                 </a:solidFill>
               </a:rPr>
               <a:t>점검 대상 현황</a:t>
@@ -3544,14 +3688,14 @@
       </p:sp>
       <p:graphicFrame>
         <p:nvGraphicFramePr>
-          <p:cNvPr id="4" name="표"/>
+          <p:cNvPr id="6" name="표"/>
           <p:cNvGraphicFramePr>
             <a:graphicFrameLocks noGrp="1"/>
           </p:cNvGraphicFramePr>
           <p:nvPr/>
         </p:nvGraphicFramePr>
         <p:xfrm>
-          <a:off x="640080" y="1600200"/>
+          <a:off x="640080" y="1783080"/>
           <a:ext cx="10911534" cy="3657600"/>
         </p:xfrm>
         <a:graphic>
@@ -3574,7 +3718,7 @@
                       <a:r>
                         <a:rPr sz="1600" b="1">
                           <a:solidFill>
-                            <a:srgbClr val="FFFFFF"/>
+                            <a:srgbClr val="26231F"/>
                           </a:solidFill>
                         </a:rPr>
                         <a:t>구분</a:t>
@@ -3584,30 +3728,30 @@
                   <a:tcPr anchor="ctr" marL="73152" marR="73152">
                     <a:lnL w="9525" cap="flat" cmpd="sng" algn="ctr">
                       <a:solidFill>
-                        <a:srgbClr val="AE4329"/>
+                        <a:srgbClr val="D88C79"/>
                       </a:solidFill>
                       <a:prstDash val="solid"/>
                     </a:lnL>
                     <a:lnR w="9525" cap="flat" cmpd="sng" algn="ctr">
                       <a:solidFill>
-                        <a:srgbClr val="AE4329"/>
+                        <a:srgbClr val="D88C79"/>
                       </a:solidFill>
                       <a:prstDash val="solid"/>
                     </a:lnR>
                     <a:lnT w="9525" cap="flat" cmpd="sng" algn="ctr">
                       <a:solidFill>
-                        <a:srgbClr val="AE4329"/>
+                        <a:srgbClr val="D88C79"/>
                       </a:solidFill>
                       <a:prstDash val="solid"/>
                     </a:lnT>
                     <a:lnB w="9525" cap="flat" cmpd="sng" algn="ctr">
                       <a:solidFill>
-                        <a:srgbClr val="AE4329"/>
+                        <a:srgbClr val="D88C79"/>
                       </a:solidFill>
                       <a:prstDash val="solid"/>
                     </a:lnB>
                     <a:solidFill>
-                      <a:srgbClr val="AE4329"/>
+                      <a:srgbClr val="D88C79"/>
                     </a:solidFill>
                   </a:tcPr>
                 </a:tc>
@@ -3620,7 +3764,7 @@
                       <a:r>
                         <a:rPr sz="1600" b="1">
                           <a:solidFill>
-                            <a:srgbClr val="FFFFFF"/>
+                            <a:srgbClr val="26231F"/>
                           </a:solidFill>
                         </a:rPr>
                         <a:t>내용</a:t>
@@ -3630,30 +3774,30 @@
                   <a:tcPr anchor="ctr" marL="73152" marR="73152">
                     <a:lnL w="9525" cap="flat" cmpd="sng" algn="ctr">
                       <a:solidFill>
-                        <a:srgbClr val="AE4329"/>
+                        <a:srgbClr val="D88C79"/>
                       </a:solidFill>
                       <a:prstDash val="solid"/>
                     </a:lnL>
                     <a:lnR w="9525" cap="flat" cmpd="sng" algn="ctr">
                       <a:solidFill>
-                        <a:srgbClr val="AE4329"/>
+                        <a:srgbClr val="D88C79"/>
                       </a:solidFill>
                       <a:prstDash val="solid"/>
                     </a:lnR>
                     <a:lnT w="9525" cap="flat" cmpd="sng" algn="ctr">
                       <a:solidFill>
-                        <a:srgbClr val="AE4329"/>
+                        <a:srgbClr val="D88C79"/>
                       </a:solidFill>
                       <a:prstDash val="solid"/>
                     </a:lnT>
                     <a:lnB w="9525" cap="flat" cmpd="sng" algn="ctr">
                       <a:solidFill>
-                        <a:srgbClr val="AE4329"/>
+                        <a:srgbClr val="D88C79"/>
                       </a:solidFill>
                       <a:prstDash val="solid"/>
                     </a:lnB>
                     <a:solidFill>
-                      <a:srgbClr val="AE4329"/>
+                      <a:srgbClr val="D88C79"/>
                     </a:solidFill>
                   </a:tcPr>
                 </a:tc>
@@ -3668,7 +3812,7 @@
                       <a:r>
                         <a:rPr sz="1600" b="1">
                           <a:solidFill>
-                            <a:srgbClr val="5B2315"/>
+                            <a:srgbClr val="492E27"/>
                           </a:solidFill>
                         </a:rPr>
                         <a:t>상호</a:t>
@@ -3678,30 +3822,30 @@
                   <a:tcPr anchor="ctr" marL="73152" marR="73152">
                     <a:lnL w="9525" cap="flat" cmpd="sng" algn="ctr">
                       <a:solidFill>
-                        <a:srgbClr val="F5D4CC"/>
+                        <a:srgbClr val="F6DCD5"/>
                       </a:solidFill>
                       <a:prstDash val="solid"/>
                     </a:lnL>
                     <a:lnR w="9525" cap="flat" cmpd="sng" algn="ctr">
                       <a:solidFill>
-                        <a:srgbClr val="F5D4CC"/>
+                        <a:srgbClr val="F6DCD5"/>
                       </a:solidFill>
                       <a:prstDash val="solid"/>
                     </a:lnR>
                     <a:lnT w="9525" cap="flat" cmpd="sng" algn="ctr">
                       <a:solidFill>
-                        <a:srgbClr val="F5D4CC"/>
+                        <a:srgbClr val="F6DCD5"/>
                       </a:solidFill>
                       <a:prstDash val="solid"/>
                     </a:lnT>
                     <a:lnB w="9525" cap="flat" cmpd="sng" algn="ctr">
                       <a:solidFill>
-                        <a:srgbClr val="F5D4CC"/>
+                        <a:srgbClr val="F6DCD5"/>
                       </a:solidFill>
                       <a:prstDash val="solid"/>
                     </a:lnB>
                     <a:solidFill>
-                      <a:srgbClr val="F5D4CC"/>
+                      <a:srgbClr val="F6DCD5"/>
                     </a:solidFill>
                   </a:tcPr>
                 </a:tc>
@@ -3714,7 +3858,7 @@
                       <a:r>
                         <a:rPr sz="1600" b="0">
                           <a:solidFill>
-                            <a:srgbClr val="2B2B2B"/>
+                            <a:srgbClr val="26231F"/>
                           </a:solidFill>
                         </a:rPr>
                         <a:t/>
@@ -3724,25 +3868,25 @@
                   <a:tcPr anchor="ctr" marL="73152" marR="73152">
                     <a:lnL w="9525" cap="flat" cmpd="sng" algn="ctr">
                       <a:solidFill>
-                        <a:srgbClr val="F5D4CC"/>
+                        <a:srgbClr val="F6DCD5"/>
                       </a:solidFill>
                       <a:prstDash val="solid"/>
                     </a:lnL>
                     <a:lnR w="9525" cap="flat" cmpd="sng" algn="ctr">
                       <a:solidFill>
-                        <a:srgbClr val="F5D4CC"/>
+                        <a:srgbClr val="F6DCD5"/>
                       </a:solidFill>
                       <a:prstDash val="solid"/>
                     </a:lnR>
                     <a:lnT w="9525" cap="flat" cmpd="sng" algn="ctr">
                       <a:solidFill>
-                        <a:srgbClr val="F5D4CC"/>
+                        <a:srgbClr val="F6DCD5"/>
                       </a:solidFill>
                       <a:prstDash val="solid"/>
                     </a:lnT>
                     <a:lnB w="9525" cap="flat" cmpd="sng" algn="ctr">
                       <a:solidFill>
-                        <a:srgbClr val="F5D4CC"/>
+                        <a:srgbClr val="F6DCD5"/>
                       </a:solidFill>
                       <a:prstDash val="solid"/>
                     </a:lnB>
@@ -3762,7 +3906,7 @@
                       <a:r>
                         <a:rPr sz="1600" b="1">
                           <a:solidFill>
-                            <a:srgbClr val="5B2315"/>
+                            <a:srgbClr val="492E27"/>
                           </a:solidFill>
                         </a:rPr>
                         <a:t>업종</a:t>
@@ -3772,30 +3916,30 @@
                   <a:tcPr anchor="ctr" marL="73152" marR="73152">
                     <a:lnL w="9525" cap="flat" cmpd="sng" algn="ctr">
                       <a:solidFill>
-                        <a:srgbClr val="F5D4CC"/>
+                        <a:srgbClr val="F6DCD5"/>
                       </a:solidFill>
                       <a:prstDash val="solid"/>
                     </a:lnL>
                     <a:lnR w="9525" cap="flat" cmpd="sng" algn="ctr">
                       <a:solidFill>
-                        <a:srgbClr val="F5D4CC"/>
+                        <a:srgbClr val="F6DCD5"/>
                       </a:solidFill>
                       <a:prstDash val="solid"/>
                     </a:lnR>
                     <a:lnT w="9525" cap="flat" cmpd="sng" algn="ctr">
                       <a:solidFill>
-                        <a:srgbClr val="F5D4CC"/>
+                        <a:srgbClr val="F6DCD5"/>
                       </a:solidFill>
                       <a:prstDash val="solid"/>
                     </a:lnT>
                     <a:lnB w="9525" cap="flat" cmpd="sng" algn="ctr">
                       <a:solidFill>
-                        <a:srgbClr val="F5D4CC"/>
+                        <a:srgbClr val="F6DCD5"/>
                       </a:solidFill>
                       <a:prstDash val="solid"/>
                     </a:lnB>
                     <a:solidFill>
-                      <a:srgbClr val="F5D4CC"/>
+                      <a:srgbClr val="F6DCD5"/>
                     </a:solidFill>
                   </a:tcPr>
                 </a:tc>
@@ -3808,7 +3952,7 @@
                       <a:r>
                         <a:rPr sz="1600" b="0">
                           <a:solidFill>
-                            <a:srgbClr val="2B2B2B"/>
+                            <a:srgbClr val="26231F"/>
                           </a:solidFill>
                         </a:rPr>
                         <a:t/>
@@ -3818,30 +3962,30 @@
                   <a:tcPr anchor="ctr" marL="73152" marR="73152">
                     <a:lnL w="9525" cap="flat" cmpd="sng" algn="ctr">
                       <a:solidFill>
-                        <a:srgbClr val="F5D4CC"/>
+                        <a:srgbClr val="F6DCD5"/>
                       </a:solidFill>
                       <a:prstDash val="solid"/>
                     </a:lnL>
                     <a:lnR w="9525" cap="flat" cmpd="sng" algn="ctr">
                       <a:solidFill>
-                        <a:srgbClr val="F5D4CC"/>
+                        <a:srgbClr val="F6DCD5"/>
                       </a:solidFill>
                       <a:prstDash val="solid"/>
                     </a:lnR>
                     <a:lnT w="9525" cap="flat" cmpd="sng" algn="ctr">
                       <a:solidFill>
-                        <a:srgbClr val="F5D4CC"/>
+                        <a:srgbClr val="F6DCD5"/>
                       </a:solidFill>
                       <a:prstDash val="solid"/>
                     </a:lnT>
                     <a:lnB w="9525" cap="flat" cmpd="sng" algn="ctr">
                       <a:solidFill>
-                        <a:srgbClr val="F5D4CC"/>
+                        <a:srgbClr val="F6DCD5"/>
                       </a:solidFill>
                       <a:prstDash val="solid"/>
                     </a:lnB>
                     <a:solidFill>
-                      <a:srgbClr val="FBF1EE"/>
+                      <a:srgbClr val="FBEFEC"/>
                     </a:solidFill>
                   </a:tcPr>
                 </a:tc>
@@ -3856,7 +4000,7 @@
                       <a:r>
                         <a:rPr sz="1600" b="1">
                           <a:solidFill>
-                            <a:srgbClr val="5B2315"/>
+                            <a:srgbClr val="492E27"/>
                           </a:solidFill>
                         </a:rPr>
                         <a:t>직원 수</a:t>
@@ -3866,30 +4010,30 @@
                   <a:tcPr anchor="ctr" marL="73152" marR="73152">
                     <a:lnL w="9525" cap="flat" cmpd="sng" algn="ctr">
                       <a:solidFill>
-                        <a:srgbClr val="F5D4CC"/>
+                        <a:srgbClr val="F6DCD5"/>
                       </a:solidFill>
                       <a:prstDash val="solid"/>
                     </a:lnL>
                     <a:lnR w="9525" cap="flat" cmpd="sng" algn="ctr">
                       <a:solidFill>
-                        <a:srgbClr val="F5D4CC"/>
+                        <a:srgbClr val="F6DCD5"/>
                       </a:solidFill>
                       <a:prstDash val="solid"/>
                     </a:lnR>
                     <a:lnT w="9525" cap="flat" cmpd="sng" algn="ctr">
                       <a:solidFill>
-                        <a:srgbClr val="F5D4CC"/>
+                        <a:srgbClr val="F6DCD5"/>
                       </a:solidFill>
                       <a:prstDash val="solid"/>
                     </a:lnT>
                     <a:lnB w="9525" cap="flat" cmpd="sng" algn="ctr">
                       <a:solidFill>
-                        <a:srgbClr val="F5D4CC"/>
+                        <a:srgbClr val="F6DCD5"/>
                       </a:solidFill>
                       <a:prstDash val="solid"/>
                     </a:lnB>
                     <a:solidFill>
-                      <a:srgbClr val="F5D4CC"/>
+                      <a:srgbClr val="F6DCD5"/>
                     </a:solidFill>
                   </a:tcPr>
                 </a:tc>
@@ -3902,7 +4046,7 @@
                       <a:r>
                         <a:rPr sz="1600" b="0">
                           <a:solidFill>
-                            <a:srgbClr val="2B2B2B"/>
+                            <a:srgbClr val="26231F"/>
                           </a:solidFill>
                         </a:rPr>
                         <a:t/>
@@ -3912,25 +4056,25 @@
                   <a:tcPr anchor="ctr" marL="73152" marR="73152">
                     <a:lnL w="9525" cap="flat" cmpd="sng" algn="ctr">
                       <a:solidFill>
-                        <a:srgbClr val="F5D4CC"/>
+                        <a:srgbClr val="F6DCD5"/>
                       </a:solidFill>
                       <a:prstDash val="solid"/>
                     </a:lnL>
                     <a:lnR w="9525" cap="flat" cmpd="sng" algn="ctr">
                       <a:solidFill>
-                        <a:srgbClr val="F5D4CC"/>
+                        <a:srgbClr val="F6DCD5"/>
                       </a:solidFill>
                       <a:prstDash val="solid"/>
                     </a:lnR>
                     <a:lnT w="9525" cap="flat" cmpd="sng" algn="ctr">
                       <a:solidFill>
-                        <a:srgbClr val="F5D4CC"/>
+                        <a:srgbClr val="F6DCD5"/>
                       </a:solidFill>
                       <a:prstDash val="solid"/>
                     </a:lnT>
                     <a:lnB w="9525" cap="flat" cmpd="sng" algn="ctr">
                       <a:solidFill>
-                        <a:srgbClr val="F5D4CC"/>
+                        <a:srgbClr val="F6DCD5"/>
                       </a:solidFill>
                       <a:prstDash val="solid"/>
                     </a:lnB>
@@ -3950,7 +4094,7 @@
                       <a:r>
                         <a:rPr sz="1600" b="1">
                           <a:solidFill>
-                            <a:srgbClr val="5B2315"/>
+                            <a:srgbClr val="492E27"/>
                           </a:solidFill>
                         </a:rPr>
                         <a:t>확인할 것</a:t>
@@ -3960,30 +4104,30 @@
                   <a:tcPr anchor="ctr" marL="73152" marR="73152">
                     <a:lnL w="9525" cap="flat" cmpd="sng" algn="ctr">
                       <a:solidFill>
-                        <a:srgbClr val="F5D4CC"/>
+                        <a:srgbClr val="F6DCD5"/>
                       </a:solidFill>
                       <a:prstDash val="solid"/>
                     </a:lnL>
                     <a:lnR w="9525" cap="flat" cmpd="sng" algn="ctr">
                       <a:solidFill>
-                        <a:srgbClr val="F5D4CC"/>
+                        <a:srgbClr val="F6DCD5"/>
                       </a:solidFill>
                       <a:prstDash val="solid"/>
                     </a:lnR>
                     <a:lnT w="9525" cap="flat" cmpd="sng" algn="ctr">
                       <a:solidFill>
-                        <a:srgbClr val="F5D4CC"/>
+                        <a:srgbClr val="F6DCD5"/>
                       </a:solidFill>
                       <a:prstDash val="solid"/>
                     </a:lnT>
                     <a:lnB w="9525" cap="flat" cmpd="sng" algn="ctr">
                       <a:solidFill>
-                        <a:srgbClr val="F5D4CC"/>
+                        <a:srgbClr val="F6DCD5"/>
                       </a:solidFill>
                       <a:prstDash val="solid"/>
                     </a:lnB>
                     <a:solidFill>
-                      <a:srgbClr val="F5D4CC"/>
+                      <a:srgbClr val="F6DCD5"/>
                     </a:solidFill>
                   </a:tcPr>
                 </a:tc>
@@ -3996,7 +4140,7 @@
                       <a:r>
                         <a:rPr sz="1600" b="0">
                           <a:solidFill>
-                            <a:srgbClr val="2B2B2B"/>
+                            <a:srgbClr val="26231F"/>
                           </a:solidFill>
                         </a:rPr>
                         <a:t/>
@@ -4006,30 +4150,30 @@
                   <a:tcPr anchor="ctr" marL="73152" marR="73152">
                     <a:lnL w="9525" cap="flat" cmpd="sng" algn="ctr">
                       <a:solidFill>
-                        <a:srgbClr val="F5D4CC"/>
+                        <a:srgbClr val="F6DCD5"/>
                       </a:solidFill>
                       <a:prstDash val="solid"/>
                     </a:lnL>
                     <a:lnR w="9525" cap="flat" cmpd="sng" algn="ctr">
                       <a:solidFill>
-                        <a:srgbClr val="F5D4CC"/>
+                        <a:srgbClr val="F6DCD5"/>
                       </a:solidFill>
                       <a:prstDash val="solid"/>
                     </a:lnR>
                     <a:lnT w="9525" cap="flat" cmpd="sng" algn="ctr">
                       <a:solidFill>
-                        <a:srgbClr val="F5D4CC"/>
+                        <a:srgbClr val="F6DCD5"/>
                       </a:solidFill>
                       <a:prstDash val="solid"/>
                     </a:lnT>
                     <a:lnB w="9525" cap="flat" cmpd="sng" algn="ctr">
                       <a:solidFill>
-                        <a:srgbClr val="F5D4CC"/>
+                        <a:srgbClr val="F6DCD5"/>
                       </a:solidFill>
                       <a:prstDash val="solid"/>
                     </a:lnB>
                     <a:solidFill>
-                      <a:srgbClr val="FBF1EE"/>
+                      <a:srgbClr val="FBEFEC"/>
                     </a:solidFill>
                   </a:tcPr>
                 </a:tc>
@@ -4052,7 +4196,7 @@
     <p:bg>
       <p:bgPr>
         <a:solidFill>
-          <a:srgbClr val="FBF1EE"/>
+          <a:srgbClr val="FBEFEC"/>
         </a:solidFill>
         <a:effectLst/>
       </p:bgPr>
@@ -4071,18 +4215,82 @@
           <p:nvPr/>
         </p:nvSpPr>
         <p:spPr>
-          <a:xfrm rot="10800000">
-            <a:off x="10637215" y="0"/>
-            <a:ext cx="914400" cy="1554480"/>
-          </a:xfrm>
-          <a:prstGeom prst="round2SameRect">
-            <a:avLst>
-              <a:gd name="adj1" fmla="val 50000"/>
-              <a:gd name="adj2" fmla="val 0"/>
-            </a:avLst>
+          <a:xfrm>
+            <a:off x="10180015" y="-1645920"/>
+            <a:ext cx="3474720" cy="3474720"/>
+          </a:xfrm>
+          <a:prstGeom prst="ellipse">
+            <a:avLst/>
           </a:prstGeom>
           <a:solidFill>
-            <a:srgbClr val="F5D4CC"/>
+            <a:srgbClr val="EBBAAD"/>
+          </a:solidFill>
+          <a:ln>
+            <a:noFill/>
+          </a:ln>
+        </p:spPr>
+        <p:txBody>
+          <a:bodyPr rtlCol="0" anchor="ctr"/>
+          <a:lstStyle/>
+          <a:p>
+            <a:pPr algn="ctr"/>
+          </a:p>
+        </p:txBody>
+      </p:sp>
+      <p:sp>
+        <p:nvSpPr>
+          <p:cNvPr id="4" name="상단 라벨"/>
+          <p:cNvSpPr txBox="1"/>
+          <p:nvPr/>
+        </p:nvSpPr>
+        <p:spPr>
+          <a:xfrm>
+            <a:off x="640080" y="274320"/>
+            <a:ext cx="5486400" cy="274320"/>
+          </a:xfrm>
+          <a:prstGeom prst="rect">
+            <a:avLst/>
+          </a:prstGeom>
+          <a:noFill/>
+        </p:spPr>
+        <p:txBody>
+          <a:bodyPr wrap="square" lIns="54864" rIns="54864" tIns="27432" bIns="27432" anchor="ctr">
+            <a:noAutofit/>
+          </a:bodyPr>
+          <a:lstStyle/>
+          <a:p>
+            <a:pPr algn="l">
+              <a:lnSpc>
+                <a:spcPct val="115000"/>
+              </a:lnSpc>
+            </a:pPr>
+            <a:r>
+              <a:rPr sz="900" b="1" i="0" spc="250">
+                <a:solidFill>
+                  <a:srgbClr val="26231F"/>
+                </a:solidFill>
+              </a:rPr>
+              <a:t>INSURANCE CHECK</a:t>
+            </a:r>
+          </a:p>
+        </p:txBody>
+      </p:sp>
+      <p:sp>
+        <p:nvSpPr>
+          <p:cNvPr id="5" name="포인트"/>
+          <p:cNvSpPr/>
+          <p:nvPr/>
+        </p:nvSpPr>
+        <p:spPr>
+          <a:xfrm>
+            <a:off x="11048695" y="502919"/>
+            <a:ext cx="274320" cy="274320"/>
+          </a:xfrm>
+          <a:prstGeom prst="donut">
+            <a:avLst/>
+          </a:prstGeom>
+          <a:solidFill>
+            <a:srgbClr val="FFFFFF"/>
           </a:solidFill>
           <a:ln>
             <a:noFill/>
@@ -4108,8 +4316,8 @@
         </p:nvSpPr>
         <p:spPr>
           <a:xfrm>
-            <a:off x="640080" y="457200"/>
-            <a:ext cx="9722815" cy="868680"/>
+            <a:off x="640080" y="658368"/>
+            <a:ext cx="9082735" cy="868680"/>
           </a:xfrm>
         </p:spPr>
         <p:txBody>
@@ -4126,7 +4334,7 @@
             <a:r>
               <a:rPr sz="3000" b="1" i="0">
                 <a:solidFill>
-                  <a:srgbClr val="5B2315"/>
+                  <a:srgbClr val="26231F"/>
                 </a:solidFill>
               </a:rPr>
               <a:t>가입한 보험 목록</a:t>
@@ -4136,14 +4344,14 @@
       </p:sp>
       <p:graphicFrame>
         <p:nvGraphicFramePr>
-          <p:cNvPr id="4" name="표"/>
+          <p:cNvPr id="6" name="표"/>
           <p:cNvGraphicFramePr>
             <a:graphicFrameLocks noGrp="1"/>
           </p:cNvGraphicFramePr>
           <p:nvPr/>
         </p:nvGraphicFramePr>
         <p:xfrm>
-          <a:off x="640080" y="1600200"/>
+          <a:off x="640080" y="1783080"/>
           <a:ext cx="10911535" cy="4224528"/>
         </p:xfrm>
         <a:graphic>
@@ -4169,7 +4377,7 @@
                       <a:r>
                         <a:rPr sz="1400" b="1">
                           <a:solidFill>
-                            <a:srgbClr val="FFFFFF"/>
+                            <a:srgbClr val="26231F"/>
                           </a:solidFill>
                         </a:rPr>
                         <a:t>보험회사</a:t>
@@ -4179,30 +4387,30 @@
                   <a:tcPr anchor="ctr" marL="73152" marR="73152">
                     <a:lnL w="9525" cap="flat" cmpd="sng" algn="ctr">
                       <a:solidFill>
-                        <a:srgbClr val="AE4329"/>
+                        <a:srgbClr val="D88C79"/>
                       </a:solidFill>
                       <a:prstDash val="solid"/>
                     </a:lnL>
                     <a:lnR w="9525" cap="flat" cmpd="sng" algn="ctr">
                       <a:solidFill>
-                        <a:srgbClr val="AE4329"/>
+                        <a:srgbClr val="D88C79"/>
                       </a:solidFill>
                       <a:prstDash val="solid"/>
                     </a:lnR>
                     <a:lnT w="9525" cap="flat" cmpd="sng" algn="ctr">
                       <a:solidFill>
-                        <a:srgbClr val="AE4329"/>
+                        <a:srgbClr val="D88C79"/>
                       </a:solidFill>
                       <a:prstDash val="solid"/>
                     </a:lnT>
                     <a:lnB w="9525" cap="flat" cmpd="sng" algn="ctr">
                       <a:solidFill>
-                        <a:srgbClr val="AE4329"/>
+                        <a:srgbClr val="D88C79"/>
                       </a:solidFill>
                       <a:prstDash val="solid"/>
                     </a:lnB>
                     <a:solidFill>
-                      <a:srgbClr val="AE4329"/>
+                      <a:srgbClr val="D88C79"/>
                     </a:solidFill>
                   </a:tcPr>
                 </a:tc>
@@ -4215,7 +4423,7 @@
                       <a:r>
                         <a:rPr sz="1400" b="1">
                           <a:solidFill>
-                            <a:srgbClr val="FFFFFF"/>
+                            <a:srgbClr val="26231F"/>
                           </a:solidFill>
                         </a:rPr>
                         <a:t>상품명</a:t>
@@ -4225,30 +4433,30 @@
                   <a:tcPr anchor="ctr" marL="73152" marR="73152">
                     <a:lnL w="9525" cap="flat" cmpd="sng" algn="ctr">
                       <a:solidFill>
-                        <a:srgbClr val="AE4329"/>
+                        <a:srgbClr val="D88C79"/>
                       </a:solidFill>
                       <a:prstDash val="solid"/>
                     </a:lnL>
                     <a:lnR w="9525" cap="flat" cmpd="sng" algn="ctr">
                       <a:solidFill>
-                        <a:srgbClr val="AE4329"/>
+                        <a:srgbClr val="D88C79"/>
                       </a:solidFill>
                       <a:prstDash val="solid"/>
                     </a:lnR>
                     <a:lnT w="9525" cap="flat" cmpd="sng" algn="ctr">
                       <a:solidFill>
-                        <a:srgbClr val="AE4329"/>
+                        <a:srgbClr val="D88C79"/>
                       </a:solidFill>
                       <a:prstDash val="solid"/>
                     </a:lnT>
                     <a:lnB w="9525" cap="flat" cmpd="sng" algn="ctr">
                       <a:solidFill>
-                        <a:srgbClr val="AE4329"/>
+                        <a:srgbClr val="D88C79"/>
                       </a:solidFill>
                       <a:prstDash val="solid"/>
                     </a:lnB>
                     <a:solidFill>
-                      <a:srgbClr val="AE4329"/>
+                      <a:srgbClr val="D88C79"/>
                     </a:solidFill>
                   </a:tcPr>
                 </a:tc>
@@ -4261,7 +4469,7 @@
                       <a:r>
                         <a:rPr sz="1400" b="1">
                           <a:solidFill>
-                            <a:srgbClr val="FFFFFF"/>
+                            <a:srgbClr val="26231F"/>
                           </a:solidFill>
                         </a:rPr>
                         <a:t>종류</a:t>
@@ -4271,30 +4479,30 @@
                   <a:tcPr anchor="ctr" marL="73152" marR="73152">
                     <a:lnL w="9525" cap="flat" cmpd="sng" algn="ctr">
                       <a:solidFill>
-                        <a:srgbClr val="AE4329"/>
+                        <a:srgbClr val="D88C79"/>
                       </a:solidFill>
                       <a:prstDash val="solid"/>
                     </a:lnL>
                     <a:lnR w="9525" cap="flat" cmpd="sng" algn="ctr">
                       <a:solidFill>
-                        <a:srgbClr val="AE4329"/>
+                        <a:srgbClr val="D88C79"/>
                       </a:solidFill>
                       <a:prstDash val="solid"/>
                     </a:lnR>
                     <a:lnT w="9525" cap="flat" cmpd="sng" algn="ctr">
                       <a:solidFill>
-                        <a:srgbClr val="AE4329"/>
+                        <a:srgbClr val="D88C79"/>
                       </a:solidFill>
                       <a:prstDash val="solid"/>
                     </a:lnT>
                     <a:lnB w="9525" cap="flat" cmpd="sng" algn="ctr">
                       <a:solidFill>
-                        <a:srgbClr val="AE4329"/>
+                        <a:srgbClr val="D88C79"/>
                       </a:solidFill>
                       <a:prstDash val="solid"/>
                     </a:lnB>
                     <a:solidFill>
-                      <a:srgbClr val="AE4329"/>
+                      <a:srgbClr val="D88C79"/>
                     </a:solidFill>
                   </a:tcPr>
                 </a:tc>
@@ -4307,7 +4515,7 @@
                       <a:r>
                         <a:rPr sz="1400" b="1">
                           <a:solidFill>
-                            <a:srgbClr val="FFFFFF"/>
+                            <a:srgbClr val="26231F"/>
                           </a:solidFill>
                         </a:rPr>
                         <a:t>만기일</a:t>
@@ -4317,30 +4525,30 @@
                   <a:tcPr anchor="ctr" marL="73152" marR="73152">
                     <a:lnL w="9525" cap="flat" cmpd="sng" algn="ctr">
                       <a:solidFill>
-                        <a:srgbClr val="AE4329"/>
+                        <a:srgbClr val="D88C79"/>
                       </a:solidFill>
                       <a:prstDash val="solid"/>
                     </a:lnL>
                     <a:lnR w="9525" cap="flat" cmpd="sng" algn="ctr">
                       <a:solidFill>
-                        <a:srgbClr val="AE4329"/>
+                        <a:srgbClr val="D88C79"/>
                       </a:solidFill>
                       <a:prstDash val="solid"/>
                     </a:lnR>
                     <a:lnT w="9525" cap="flat" cmpd="sng" algn="ctr">
                       <a:solidFill>
-                        <a:srgbClr val="AE4329"/>
+                        <a:srgbClr val="D88C79"/>
                       </a:solidFill>
                       <a:prstDash val="solid"/>
                     </a:lnT>
                     <a:lnB w="9525" cap="flat" cmpd="sng" algn="ctr">
                       <a:solidFill>
-                        <a:srgbClr val="AE4329"/>
+                        <a:srgbClr val="D88C79"/>
                       </a:solidFill>
                       <a:prstDash val="solid"/>
                     </a:lnB>
                     <a:solidFill>
-                      <a:srgbClr val="AE4329"/>
+                      <a:srgbClr val="D88C79"/>
                     </a:solidFill>
                   </a:tcPr>
                 </a:tc>
@@ -4353,7 +4561,7 @@
                       <a:r>
                         <a:rPr sz="1400" b="1">
                           <a:solidFill>
-                            <a:srgbClr val="FFFFFF"/>
+                            <a:srgbClr val="26231F"/>
                           </a:solidFill>
                         </a:rPr>
                         <a:t>월 보험료</a:t>
@@ -4363,30 +4571,30 @@
                   <a:tcPr anchor="ctr" marL="73152" marR="73152">
                     <a:lnL w="9525" cap="flat" cmpd="sng" algn="ctr">
                       <a:solidFill>
-                        <a:srgbClr val="AE4329"/>
+                        <a:srgbClr val="D88C79"/>
                       </a:solidFill>
                       <a:prstDash val="solid"/>
                     </a:lnL>
                     <a:lnR w="9525" cap="flat" cmpd="sng" algn="ctr">
                       <a:solidFill>
-                        <a:srgbClr val="AE4329"/>
+                        <a:srgbClr val="D88C79"/>
                       </a:solidFill>
                       <a:prstDash val="solid"/>
                     </a:lnR>
                     <a:lnT w="9525" cap="flat" cmpd="sng" algn="ctr">
                       <a:solidFill>
-                        <a:srgbClr val="AE4329"/>
+                        <a:srgbClr val="D88C79"/>
                       </a:solidFill>
                       <a:prstDash val="solid"/>
                     </a:lnT>
                     <a:lnB w="9525" cap="flat" cmpd="sng" algn="ctr">
                       <a:solidFill>
-                        <a:srgbClr val="AE4329"/>
+                        <a:srgbClr val="D88C79"/>
                       </a:solidFill>
                       <a:prstDash val="solid"/>
                     </a:lnB>
                     <a:solidFill>
-                      <a:srgbClr val="AE4329"/>
+                      <a:srgbClr val="D88C79"/>
                     </a:solidFill>
                   </a:tcPr>
                 </a:tc>
@@ -4401,7 +4609,7 @@
                       <a:r>
                         <a:rPr sz="1400" b="0">
                           <a:solidFill>
-                            <a:srgbClr val="2B2B2B"/>
+                            <a:srgbClr val="26231F"/>
                           </a:solidFill>
                         </a:rPr>
                         <a:t/>
@@ -4411,25 +4619,25 @@
                   <a:tcPr anchor="ctr" marL="73152" marR="73152">
                     <a:lnL w="9525" cap="flat" cmpd="sng" algn="ctr">
                       <a:solidFill>
-                        <a:srgbClr val="F5D4CC"/>
+                        <a:srgbClr val="F6DCD5"/>
                       </a:solidFill>
                       <a:prstDash val="solid"/>
                     </a:lnL>
                     <a:lnR w="9525" cap="flat" cmpd="sng" algn="ctr">
                       <a:solidFill>
-                        <a:srgbClr val="F5D4CC"/>
+                        <a:srgbClr val="F6DCD5"/>
                       </a:solidFill>
                       <a:prstDash val="solid"/>
                     </a:lnR>
                     <a:lnT w="9525" cap="flat" cmpd="sng" algn="ctr">
                       <a:solidFill>
-                        <a:srgbClr val="F5D4CC"/>
+                        <a:srgbClr val="F6DCD5"/>
                       </a:solidFill>
                       <a:prstDash val="solid"/>
                     </a:lnT>
                     <a:lnB w="9525" cap="flat" cmpd="sng" algn="ctr">
                       <a:solidFill>
-                        <a:srgbClr val="F5D4CC"/>
+                        <a:srgbClr val="F6DCD5"/>
                       </a:solidFill>
                       <a:prstDash val="solid"/>
                     </a:lnB>
@@ -4447,7 +4655,7 @@
                       <a:r>
                         <a:rPr sz="1400" b="0">
                           <a:solidFill>
-                            <a:srgbClr val="2B2B2B"/>
+                            <a:srgbClr val="26231F"/>
                           </a:solidFill>
                         </a:rPr>
                         <a:t/>
@@ -4457,25 +4665,25 @@
                   <a:tcPr anchor="ctr" marL="73152" marR="73152">
                     <a:lnL w="9525" cap="flat" cmpd="sng" algn="ctr">
                       <a:solidFill>
-                        <a:srgbClr val="F5D4CC"/>
+                        <a:srgbClr val="F6DCD5"/>
                       </a:solidFill>
                       <a:prstDash val="solid"/>
                     </a:lnL>
                     <a:lnR w="9525" cap="flat" cmpd="sng" algn="ctr">
                       <a:solidFill>
-                        <a:srgbClr val="F5D4CC"/>
+                        <a:srgbClr val="F6DCD5"/>
                       </a:solidFill>
                       <a:prstDash val="solid"/>
                     </a:lnR>
                     <a:lnT w="9525" cap="flat" cmpd="sng" algn="ctr">
                       <a:solidFill>
-                        <a:srgbClr val="F5D4CC"/>
+                        <a:srgbClr val="F6DCD5"/>
                       </a:solidFill>
                       <a:prstDash val="solid"/>
                     </a:lnT>
                     <a:lnB w="9525" cap="flat" cmpd="sng" algn="ctr">
                       <a:solidFill>
-                        <a:srgbClr val="F5D4CC"/>
+                        <a:srgbClr val="F6DCD5"/>
                       </a:solidFill>
                       <a:prstDash val="solid"/>
                     </a:lnB>
@@ -4493,7 +4701,7 @@
                       <a:r>
                         <a:rPr sz="1400" b="0">
                           <a:solidFill>
-                            <a:srgbClr val="2B2B2B"/>
+                            <a:srgbClr val="26231F"/>
                           </a:solidFill>
                         </a:rPr>
                         <a:t/>
@@ -4503,25 +4711,25 @@
                   <a:tcPr anchor="ctr" marL="73152" marR="73152">
                     <a:lnL w="9525" cap="flat" cmpd="sng" algn="ctr">
                       <a:solidFill>
-                        <a:srgbClr val="F5D4CC"/>
+                        <a:srgbClr val="F6DCD5"/>
                       </a:solidFill>
                       <a:prstDash val="solid"/>
                     </a:lnL>
                     <a:lnR w="9525" cap="flat" cmpd="sng" algn="ctr">
                       <a:solidFill>
-                        <a:srgbClr val="F5D4CC"/>
+                        <a:srgbClr val="F6DCD5"/>
                       </a:solidFill>
                       <a:prstDash val="solid"/>
                     </a:lnR>
                     <a:lnT w="9525" cap="flat" cmpd="sng" algn="ctr">
                       <a:solidFill>
-                        <a:srgbClr val="F5D4CC"/>
+                        <a:srgbClr val="F6DCD5"/>
                       </a:solidFill>
                       <a:prstDash val="solid"/>
                     </a:lnT>
                     <a:lnB w="9525" cap="flat" cmpd="sng" algn="ctr">
                       <a:solidFill>
-                        <a:srgbClr val="F5D4CC"/>
+                        <a:srgbClr val="F6DCD5"/>
                       </a:solidFill>
                       <a:prstDash val="solid"/>
                     </a:lnB>
@@ -4539,7 +4747,7 @@
                       <a:r>
                         <a:rPr sz="1400" b="0">
                           <a:solidFill>
-                            <a:srgbClr val="2B2B2B"/>
+                            <a:srgbClr val="26231F"/>
                           </a:solidFill>
                         </a:rPr>
                         <a:t/>
@@ -4549,25 +4757,25 @@
                   <a:tcPr anchor="ctr" marL="73152" marR="73152">
                     <a:lnL w="9525" cap="flat" cmpd="sng" algn="ctr">
                       <a:solidFill>
-                        <a:srgbClr val="F5D4CC"/>
+                        <a:srgbClr val="F6DCD5"/>
                       </a:solidFill>
                       <a:prstDash val="solid"/>
                     </a:lnL>
                     <a:lnR w="9525" cap="flat" cmpd="sng" algn="ctr">
                       <a:solidFill>
-                        <a:srgbClr val="F5D4CC"/>
+                        <a:srgbClr val="F6DCD5"/>
                       </a:solidFill>
                       <a:prstDash val="solid"/>
                     </a:lnR>
                     <a:lnT w="9525" cap="flat" cmpd="sng" algn="ctr">
                       <a:solidFill>
-                        <a:srgbClr val="F5D4CC"/>
+                        <a:srgbClr val="F6DCD5"/>
                       </a:solidFill>
                       <a:prstDash val="solid"/>
                     </a:lnT>
                     <a:lnB w="9525" cap="flat" cmpd="sng" algn="ctr">
                       <a:solidFill>
-                        <a:srgbClr val="F5D4CC"/>
+                        <a:srgbClr val="F6DCD5"/>
                       </a:solidFill>
                       <a:prstDash val="solid"/>
                     </a:lnB>
@@ -4585,7 +4793,7 @@
                       <a:r>
                         <a:rPr sz="1400" b="0">
                           <a:solidFill>
-                            <a:srgbClr val="2B2B2B"/>
+                            <a:srgbClr val="26231F"/>
                           </a:solidFill>
                         </a:rPr>
                         <a:t/>
@@ -4595,25 +4803,25 @@
                   <a:tcPr anchor="ctr" marL="73152" marR="73152">
                     <a:lnL w="9525" cap="flat" cmpd="sng" algn="ctr">
                       <a:solidFill>
-                        <a:srgbClr val="F5D4CC"/>
+                        <a:srgbClr val="F6DCD5"/>
                       </a:solidFill>
                       <a:prstDash val="solid"/>
                     </a:lnL>
                     <a:lnR w="9525" cap="flat" cmpd="sng" algn="ctr">
                       <a:solidFill>
-                        <a:srgbClr val="F5D4CC"/>
+                        <a:srgbClr val="F6DCD5"/>
                       </a:solidFill>
                       <a:prstDash val="solid"/>
                     </a:lnR>
                     <a:lnT w="9525" cap="flat" cmpd="sng" algn="ctr">
                       <a:solidFill>
-                        <a:srgbClr val="F5D4CC"/>
+                        <a:srgbClr val="F6DCD5"/>
                       </a:solidFill>
                       <a:prstDash val="solid"/>
                     </a:lnT>
                     <a:lnB w="9525" cap="flat" cmpd="sng" algn="ctr">
                       <a:solidFill>
-                        <a:srgbClr val="F5D4CC"/>
+                        <a:srgbClr val="F6DCD5"/>
                       </a:solidFill>
                       <a:prstDash val="solid"/>
                     </a:lnB>
@@ -4633,7 +4841,7 @@
                       <a:r>
                         <a:rPr sz="1400" b="0">
                           <a:solidFill>
-                            <a:srgbClr val="2B2B2B"/>
+                            <a:srgbClr val="26231F"/>
                           </a:solidFill>
                         </a:rPr>
                         <a:t/>
@@ -4643,30 +4851,30 @@
                   <a:tcPr anchor="ctr" marL="73152" marR="73152">
                     <a:lnL w="9525" cap="flat" cmpd="sng" algn="ctr">
                       <a:solidFill>
-                        <a:srgbClr val="F5D4CC"/>
+                        <a:srgbClr val="F6DCD5"/>
                       </a:solidFill>
                       <a:prstDash val="solid"/>
                     </a:lnL>
                     <a:lnR w="9525" cap="flat" cmpd="sng" algn="ctr">
                       <a:solidFill>
-                        <a:srgbClr val="F5D4CC"/>
+                        <a:srgbClr val="F6DCD5"/>
                       </a:solidFill>
                       <a:prstDash val="solid"/>
                     </a:lnR>
                     <a:lnT w="9525" cap="flat" cmpd="sng" algn="ctr">
                       <a:solidFill>
-                        <a:srgbClr val="F5D4CC"/>
+                        <a:srgbClr val="F6DCD5"/>
                       </a:solidFill>
                       <a:prstDash val="solid"/>
                     </a:lnT>
                     <a:lnB w="9525" cap="flat" cmpd="sng" algn="ctr">
                       <a:solidFill>
-                        <a:srgbClr val="F5D4CC"/>
+                        <a:srgbClr val="F6DCD5"/>
                       </a:solidFill>
                       <a:prstDash val="solid"/>
                     </a:lnB>
                     <a:solidFill>
-                      <a:srgbClr val="FBF1EE"/>
+                      <a:srgbClr val="FBEFEC"/>
                     </a:solidFill>
                   </a:tcPr>
                 </a:tc>
@@ -4679,7 +4887,7 @@
                       <a:r>
                         <a:rPr sz="1400" b="0">
                           <a:solidFill>
-                            <a:srgbClr val="2B2B2B"/>
+                            <a:srgbClr val="26231F"/>
                           </a:solidFill>
                         </a:rPr>
                         <a:t/>
@@ -4689,30 +4897,30 @@
                   <a:tcPr anchor="ctr" marL="73152" marR="73152">
                     <a:lnL w="9525" cap="flat" cmpd="sng" algn="ctr">
                       <a:solidFill>
-                        <a:srgbClr val="F5D4CC"/>
+                        <a:srgbClr val="F6DCD5"/>
                       </a:solidFill>
                       <a:prstDash val="solid"/>
                     </a:lnL>
                     <a:lnR w="9525" cap="flat" cmpd="sng" algn="ctr">
                       <a:solidFill>
-                        <a:srgbClr val="F5D4CC"/>
+                        <a:srgbClr val="F6DCD5"/>
                       </a:solidFill>
                       <a:prstDash val="solid"/>
                     </a:lnR>
                     <a:lnT w="9525" cap="flat" cmpd="sng" algn="ctr">
                       <a:solidFill>
-                        <a:srgbClr val="F5D4CC"/>
+                        <a:srgbClr val="F6DCD5"/>
                       </a:solidFill>
                       <a:prstDash val="solid"/>
                     </a:lnT>
                     <a:lnB w="9525" cap="flat" cmpd="sng" algn="ctr">
                       <a:solidFill>
-                        <a:srgbClr val="F5D4CC"/>
+                        <a:srgbClr val="F6DCD5"/>
                       </a:solidFill>
                       <a:prstDash val="solid"/>
                     </a:lnB>
                     <a:solidFill>
-                      <a:srgbClr val="FBF1EE"/>
+                      <a:srgbClr val="FBEFEC"/>
                     </a:solidFill>
                   </a:tcPr>
                 </a:tc>
@@ -4725,7 +4933,7 @@
                       <a:r>
                         <a:rPr sz="1400" b="0">
                           <a:solidFill>
-                            <a:srgbClr val="2B2B2B"/>
+                            <a:srgbClr val="26231F"/>
                           </a:solidFill>
                         </a:rPr>
                         <a:t/>
@@ -4735,30 +4943,30 @@
                   <a:tcPr anchor="ctr" marL="73152" marR="73152">
                     <a:lnL w="9525" cap="flat" cmpd="sng" algn="ctr">
                       <a:solidFill>
-                        <a:srgbClr val="F5D4CC"/>
+                        <a:srgbClr val="F6DCD5"/>
                       </a:solidFill>
                       <a:prstDash val="solid"/>
                     </a:lnL>
                     <a:lnR w="9525" cap="flat" cmpd="sng" algn="ctr">
                       <a:solidFill>
-                        <a:srgbClr val="F5D4CC"/>
+                        <a:srgbClr val="F6DCD5"/>
                       </a:solidFill>
                       <a:prstDash val="solid"/>
                     </a:lnR>
                     <a:lnT w="9525" cap="flat" cmpd="sng" algn="ctr">
                       <a:solidFill>
-                        <a:srgbClr val="F5D4CC"/>
+                        <a:srgbClr val="F6DCD5"/>
                       </a:solidFill>
                       <a:prstDash val="solid"/>
                     </a:lnT>
                     <a:lnB w="9525" cap="flat" cmpd="sng" algn="ctr">
                       <a:solidFill>
-                        <a:srgbClr val="F5D4CC"/>
+                        <a:srgbClr val="F6DCD5"/>
                       </a:solidFill>
                       <a:prstDash val="solid"/>
                     </a:lnB>
                     <a:solidFill>
-                      <a:srgbClr val="FBF1EE"/>
+                      <a:srgbClr val="FBEFEC"/>
                     </a:solidFill>
                   </a:tcPr>
                 </a:tc>
@@ -4771,7 +4979,7 @@
                       <a:r>
                         <a:rPr sz="1400" b="0">
                           <a:solidFill>
-                            <a:srgbClr val="2B2B2B"/>
+                            <a:srgbClr val="26231F"/>
                           </a:solidFill>
                         </a:rPr>
                         <a:t/>
@@ -4781,30 +4989,30 @@
                   <a:tcPr anchor="ctr" marL="73152" marR="73152">
                     <a:lnL w="9525" cap="flat" cmpd="sng" algn="ctr">
                       <a:solidFill>
-                        <a:srgbClr val="F5D4CC"/>
+                        <a:srgbClr val="F6DCD5"/>
                       </a:solidFill>
                       <a:prstDash val="solid"/>
                     </a:lnL>
                     <a:lnR w="9525" cap="flat" cmpd="sng" algn="ctr">
                       <a:solidFill>
-                        <a:srgbClr val="F5D4CC"/>
+                        <a:srgbClr val="F6DCD5"/>
                       </a:solidFill>
                       <a:prstDash val="solid"/>
                     </a:lnR>
                     <a:lnT w="9525" cap="flat" cmpd="sng" algn="ctr">
                       <a:solidFill>
-                        <a:srgbClr val="F5D4CC"/>
+                        <a:srgbClr val="F6DCD5"/>
                       </a:solidFill>
                       <a:prstDash val="solid"/>
                     </a:lnT>
                     <a:lnB w="9525" cap="flat" cmpd="sng" algn="ctr">
                       <a:solidFill>
-                        <a:srgbClr val="F5D4CC"/>
+                        <a:srgbClr val="F6DCD5"/>
                       </a:solidFill>
                       <a:prstDash val="solid"/>
                     </a:lnB>
                     <a:solidFill>
-                      <a:srgbClr val="FBF1EE"/>
+                      <a:srgbClr val="FBEFEC"/>
                     </a:solidFill>
                   </a:tcPr>
                 </a:tc>
@@ -4817,7 +5025,7 @@
                       <a:r>
                         <a:rPr sz="1400" b="0">
                           <a:solidFill>
-                            <a:srgbClr val="2B2B2B"/>
+                            <a:srgbClr val="26231F"/>
                           </a:solidFill>
                         </a:rPr>
                         <a:t/>
@@ -4827,30 +5035,30 @@
                   <a:tcPr anchor="ctr" marL="73152" marR="73152">
                     <a:lnL w="9525" cap="flat" cmpd="sng" algn="ctr">
                       <a:solidFill>
-                        <a:srgbClr val="F5D4CC"/>
+                        <a:srgbClr val="F6DCD5"/>
                       </a:solidFill>
                       <a:prstDash val="solid"/>
                     </a:lnL>
                     <a:lnR w="9525" cap="flat" cmpd="sng" algn="ctr">
                       <a:solidFill>
-                        <a:srgbClr val="F5D4CC"/>
+                        <a:srgbClr val="F6DCD5"/>
                       </a:solidFill>
                       <a:prstDash val="solid"/>
                     </a:lnR>
                     <a:lnT w="9525" cap="flat" cmpd="sng" algn="ctr">
                       <a:solidFill>
-                        <a:srgbClr val="F5D4CC"/>
+                        <a:srgbClr val="F6DCD5"/>
                       </a:solidFill>
                       <a:prstDash val="solid"/>
                     </a:lnT>
                     <a:lnB w="9525" cap="flat" cmpd="sng" algn="ctr">
                       <a:solidFill>
-                        <a:srgbClr val="F5D4CC"/>
+                        <a:srgbClr val="F6DCD5"/>
                       </a:solidFill>
                       <a:prstDash val="solid"/>
                     </a:lnB>
                     <a:solidFill>
-                      <a:srgbClr val="FBF1EE"/>
+                      <a:srgbClr val="FBEFEC"/>
                     </a:solidFill>
                   </a:tcPr>
                 </a:tc>
@@ -4865,7 +5073,7 @@
                       <a:r>
                         <a:rPr sz="1400" b="0">
                           <a:solidFill>
-                            <a:srgbClr val="2B2B2B"/>
+                            <a:srgbClr val="26231F"/>
                           </a:solidFill>
                         </a:rPr>
                         <a:t/>
@@ -4875,25 +5083,25 @@
                   <a:tcPr anchor="ctr" marL="73152" marR="73152">
                     <a:lnL w="9525" cap="flat" cmpd="sng" algn="ctr">
                       <a:solidFill>
-                        <a:srgbClr val="F5D4CC"/>
+                        <a:srgbClr val="F6DCD5"/>
                       </a:solidFill>
                       <a:prstDash val="solid"/>
                     </a:lnL>
                     <a:lnR w="9525" cap="flat" cmpd="sng" algn="ctr">
                       <a:solidFill>
-                        <a:srgbClr val="F5D4CC"/>
+                        <a:srgbClr val="F6DCD5"/>
                       </a:solidFill>
                       <a:prstDash val="solid"/>
                     </a:lnR>
                     <a:lnT w="9525" cap="flat" cmpd="sng" algn="ctr">
                       <a:solidFill>
-                        <a:srgbClr val="F5D4CC"/>
+                        <a:srgbClr val="F6DCD5"/>
                       </a:solidFill>
                       <a:prstDash val="solid"/>
                     </a:lnT>
                     <a:lnB w="9525" cap="flat" cmpd="sng" algn="ctr">
                       <a:solidFill>
-                        <a:srgbClr val="F5D4CC"/>
+                        <a:srgbClr val="F6DCD5"/>
                       </a:solidFill>
                       <a:prstDash val="solid"/>
                     </a:lnB>
@@ -4911,7 +5119,7 @@
                       <a:r>
                         <a:rPr sz="1400" b="0">
                           <a:solidFill>
-                            <a:srgbClr val="2B2B2B"/>
+                            <a:srgbClr val="26231F"/>
                           </a:solidFill>
                         </a:rPr>
                         <a:t/>
@@ -4921,25 +5129,25 @@
                   <a:tcPr anchor="ctr" marL="73152" marR="73152">
                     <a:lnL w="9525" cap="flat" cmpd="sng" algn="ctr">
                       <a:solidFill>
-                        <a:srgbClr val="F5D4CC"/>
+                        <a:srgbClr val="F6DCD5"/>
                       </a:solidFill>
                       <a:prstDash val="solid"/>
                     </a:lnL>
                     <a:lnR w="9525" cap="flat" cmpd="sng" algn="ctr">
                       <a:solidFill>
-                        <a:srgbClr val="F5D4CC"/>
+                        <a:srgbClr val="F6DCD5"/>
                       </a:solidFill>
                       <a:prstDash val="solid"/>
                     </a:lnR>
                     <a:lnT w="9525" cap="flat" cmpd="sng" algn="ctr">
                       <a:solidFill>
-                        <a:srgbClr val="F5D4CC"/>
+                        <a:srgbClr val="F6DCD5"/>
                       </a:solidFill>
                       <a:prstDash val="solid"/>
                     </a:lnT>
                     <a:lnB w="9525" cap="flat" cmpd="sng" algn="ctr">
                       <a:solidFill>
-                        <a:srgbClr val="F5D4CC"/>
+                        <a:srgbClr val="F6DCD5"/>
                       </a:solidFill>
                       <a:prstDash val="solid"/>
                     </a:lnB>
@@ -4957,7 +5165,7 @@
                       <a:r>
                         <a:rPr sz="1400" b="0">
                           <a:solidFill>
-                            <a:srgbClr val="2B2B2B"/>
+                            <a:srgbClr val="26231F"/>
                           </a:solidFill>
                         </a:rPr>
                         <a:t/>
@@ -4967,25 +5175,25 @@
                   <a:tcPr anchor="ctr" marL="73152" marR="73152">
                     <a:lnL w="9525" cap="flat" cmpd="sng" algn="ctr">
                       <a:solidFill>
-                        <a:srgbClr val="F5D4CC"/>
+                        <a:srgbClr val="F6DCD5"/>
                       </a:solidFill>
                       <a:prstDash val="solid"/>
                     </a:lnL>
                     <a:lnR w="9525" cap="flat" cmpd="sng" algn="ctr">
                       <a:solidFill>
-                        <a:srgbClr val="F5D4CC"/>
+                        <a:srgbClr val="F6DCD5"/>
                       </a:solidFill>
                       <a:prstDash val="solid"/>
                     </a:lnR>
                     <a:lnT w="9525" cap="flat" cmpd="sng" algn="ctr">
                       <a:solidFill>
-                        <a:srgbClr val="F5D4CC"/>
+                        <a:srgbClr val="F6DCD5"/>
                       </a:solidFill>
                       <a:prstDash val="solid"/>
                     </a:lnT>
                     <a:lnB w="9525" cap="flat" cmpd="sng" algn="ctr">
                       <a:solidFill>
-                        <a:srgbClr val="F5D4CC"/>
+                        <a:srgbClr val="F6DCD5"/>
                       </a:solidFill>
                       <a:prstDash val="solid"/>
                     </a:lnB>
@@ -5003,7 +5211,7 @@
                       <a:r>
                         <a:rPr sz="1400" b="0">
                           <a:solidFill>
-                            <a:srgbClr val="2B2B2B"/>
+                            <a:srgbClr val="26231F"/>
                           </a:solidFill>
                         </a:rPr>
                         <a:t/>
@@ -5013,25 +5221,25 @@
                   <a:tcPr anchor="ctr" marL="73152" marR="73152">
                     <a:lnL w="9525" cap="flat" cmpd="sng" algn="ctr">
                       <a:solidFill>
-                        <a:srgbClr val="F5D4CC"/>
+                        <a:srgbClr val="F6DCD5"/>
                       </a:solidFill>
                       <a:prstDash val="solid"/>
                     </a:lnL>
                     <a:lnR w="9525" cap="flat" cmpd="sng" algn="ctr">
                       <a:solidFill>
-                        <a:srgbClr val="F5D4CC"/>
+                        <a:srgbClr val="F6DCD5"/>
                       </a:solidFill>
                       <a:prstDash val="solid"/>
                     </a:lnR>
                     <a:lnT w="9525" cap="flat" cmpd="sng" algn="ctr">
                       <a:solidFill>
-                        <a:srgbClr val="F5D4CC"/>
+                        <a:srgbClr val="F6DCD5"/>
                       </a:solidFill>
                       <a:prstDash val="solid"/>
                     </a:lnT>
                     <a:lnB w="9525" cap="flat" cmpd="sng" algn="ctr">
                       <a:solidFill>
-                        <a:srgbClr val="F5D4CC"/>
+                        <a:srgbClr val="F6DCD5"/>
                       </a:solidFill>
                       <a:prstDash val="solid"/>
                     </a:lnB>
@@ -5049,7 +5257,7 @@
                       <a:r>
                         <a:rPr sz="1400" b="0">
                           <a:solidFill>
-                            <a:srgbClr val="2B2B2B"/>
+                            <a:srgbClr val="26231F"/>
                           </a:solidFill>
                         </a:rPr>
                         <a:t/>
@@ -5059,25 +5267,25 @@
                   <a:tcPr anchor="ctr" marL="73152" marR="73152">
                     <a:lnL w="9525" cap="flat" cmpd="sng" algn="ctr">
                       <a:solidFill>
-                        <a:srgbClr val="F5D4CC"/>
+                        <a:srgbClr val="F6DCD5"/>
                       </a:solidFill>
                       <a:prstDash val="solid"/>
                     </a:lnL>
                     <a:lnR w="9525" cap="flat" cmpd="sng" algn="ctr">
                       <a:solidFill>
-                        <a:srgbClr val="F5D4CC"/>
+                        <a:srgbClr val="F6DCD5"/>
                       </a:solidFill>
                       <a:prstDash val="solid"/>
                     </a:lnR>
                     <a:lnT w="9525" cap="flat" cmpd="sng" algn="ctr">
                       <a:solidFill>
-                        <a:srgbClr val="F5D4CC"/>
+                        <a:srgbClr val="F6DCD5"/>
                       </a:solidFill>
                       <a:prstDash val="solid"/>
                     </a:lnT>
                     <a:lnB w="9525" cap="flat" cmpd="sng" algn="ctr">
                       <a:solidFill>
-                        <a:srgbClr val="F5D4CC"/>
+                        <a:srgbClr val="F6DCD5"/>
                       </a:solidFill>
                       <a:prstDash val="solid"/>
                     </a:lnB>
@@ -5097,7 +5305,7 @@
                       <a:r>
                         <a:rPr sz="1400" b="0">
                           <a:solidFill>
-                            <a:srgbClr val="2B2B2B"/>
+                            <a:srgbClr val="26231F"/>
                           </a:solidFill>
                         </a:rPr>
                         <a:t/>
@@ -5107,30 +5315,30 @@
                   <a:tcPr anchor="ctr" marL="73152" marR="73152">
                     <a:lnL w="9525" cap="flat" cmpd="sng" algn="ctr">
                       <a:solidFill>
-                        <a:srgbClr val="F5D4CC"/>
+                        <a:srgbClr val="F6DCD5"/>
                       </a:solidFill>
                       <a:prstDash val="solid"/>
                     </a:lnL>
                     <a:lnR w="9525" cap="flat" cmpd="sng" algn="ctr">
                       <a:solidFill>
-                        <a:srgbClr val="F5D4CC"/>
+                        <a:srgbClr val="F6DCD5"/>
                       </a:solidFill>
                       <a:prstDash val="solid"/>
                     </a:lnR>
                     <a:lnT w="9525" cap="flat" cmpd="sng" algn="ctr">
                       <a:solidFill>
-                        <a:srgbClr val="F5D4CC"/>
+                        <a:srgbClr val="F6DCD5"/>
                       </a:solidFill>
                       <a:prstDash val="solid"/>
                     </a:lnT>
                     <a:lnB w="9525" cap="flat" cmpd="sng" algn="ctr">
                       <a:solidFill>
-                        <a:srgbClr val="F5D4CC"/>
+                        <a:srgbClr val="F6DCD5"/>
                       </a:solidFill>
                       <a:prstDash val="solid"/>
                     </a:lnB>
                     <a:solidFill>
-                      <a:srgbClr val="FBF1EE"/>
+                      <a:srgbClr val="FBEFEC"/>
                     </a:solidFill>
                   </a:tcPr>
                 </a:tc>
@@ -5143,7 +5351,7 @@
                       <a:r>
                         <a:rPr sz="1400" b="0">
                           <a:solidFill>
-                            <a:srgbClr val="2B2B2B"/>
+                            <a:srgbClr val="26231F"/>
                           </a:solidFill>
                         </a:rPr>
                         <a:t/>
@@ -5153,30 +5361,30 @@
                   <a:tcPr anchor="ctr" marL="73152" marR="73152">
                     <a:lnL w="9525" cap="flat" cmpd="sng" algn="ctr">
                       <a:solidFill>
-                        <a:srgbClr val="F5D4CC"/>
+                        <a:srgbClr val="F6DCD5"/>
                       </a:solidFill>
                       <a:prstDash val="solid"/>
                     </a:lnL>
                     <a:lnR w="9525" cap="flat" cmpd="sng" algn="ctr">
                       <a:solidFill>
-                        <a:srgbClr val="F5D4CC"/>
+                        <a:srgbClr val="F6DCD5"/>
                       </a:solidFill>
                       <a:prstDash val="solid"/>
                     </a:lnR>
                     <a:lnT w="9525" cap="flat" cmpd="sng" algn="ctr">
                       <a:solidFill>
-                        <a:srgbClr val="F5D4CC"/>
+                        <a:srgbClr val="F6DCD5"/>
                       </a:solidFill>
                       <a:prstDash val="solid"/>
                     </a:lnT>
                     <a:lnB w="9525" cap="flat" cmpd="sng" algn="ctr">
                       <a:solidFill>
-                        <a:srgbClr val="F5D4CC"/>
+                        <a:srgbClr val="F6DCD5"/>
                       </a:solidFill>
                       <a:prstDash val="solid"/>
                     </a:lnB>
                     <a:solidFill>
-                      <a:srgbClr val="FBF1EE"/>
+                      <a:srgbClr val="FBEFEC"/>
                     </a:solidFill>
                   </a:tcPr>
                 </a:tc>
@@ -5189,7 +5397,7 @@
                       <a:r>
                         <a:rPr sz="1400" b="0">
                           <a:solidFill>
-                            <a:srgbClr val="2B2B2B"/>
+                            <a:srgbClr val="26231F"/>
                           </a:solidFill>
                         </a:rPr>
                         <a:t/>
@@ -5199,30 +5407,30 @@
                   <a:tcPr anchor="ctr" marL="73152" marR="73152">
                     <a:lnL w="9525" cap="flat" cmpd="sng" algn="ctr">
                       <a:solidFill>
-                        <a:srgbClr val="F5D4CC"/>
+                        <a:srgbClr val="F6DCD5"/>
                       </a:solidFill>
                       <a:prstDash val="solid"/>
                     </a:lnL>
                     <a:lnR w="9525" cap="flat" cmpd="sng" algn="ctr">
                       <a:solidFill>
-                        <a:srgbClr val="F5D4CC"/>
+                        <a:srgbClr val="F6DCD5"/>
                       </a:solidFill>
                       <a:prstDash val="solid"/>
                     </a:lnR>
                     <a:lnT w="9525" cap="flat" cmpd="sng" algn="ctr">
                       <a:solidFill>
-                        <a:srgbClr val="F5D4CC"/>
+                        <a:srgbClr val="F6DCD5"/>
                       </a:solidFill>
                       <a:prstDash val="solid"/>
                     </a:lnT>
                     <a:lnB w="9525" cap="flat" cmpd="sng" algn="ctr">
                       <a:solidFill>
-                        <a:srgbClr val="F5D4CC"/>
+                        <a:srgbClr val="F6DCD5"/>
                       </a:solidFill>
                       <a:prstDash val="solid"/>
                     </a:lnB>
                     <a:solidFill>
-                      <a:srgbClr val="FBF1EE"/>
+                      <a:srgbClr val="FBEFEC"/>
                     </a:solidFill>
                   </a:tcPr>
                 </a:tc>
@@ -5235,7 +5443,7 @@
                       <a:r>
                         <a:rPr sz="1400" b="0">
                           <a:solidFill>
-                            <a:srgbClr val="2B2B2B"/>
+                            <a:srgbClr val="26231F"/>
                           </a:solidFill>
                         </a:rPr>
                         <a:t/>
@@ -5245,30 +5453,30 @@
                   <a:tcPr anchor="ctr" marL="73152" marR="73152">
                     <a:lnL w="9525" cap="flat" cmpd="sng" algn="ctr">
                       <a:solidFill>
-                        <a:srgbClr val="F5D4CC"/>
+                        <a:srgbClr val="F6DCD5"/>
                       </a:solidFill>
                       <a:prstDash val="solid"/>
                     </a:lnL>
                     <a:lnR w="9525" cap="flat" cmpd="sng" algn="ctr">
                       <a:solidFill>
-                        <a:srgbClr val="F5D4CC"/>
+                        <a:srgbClr val="F6DCD5"/>
                       </a:solidFill>
                       <a:prstDash val="solid"/>
                     </a:lnR>
                     <a:lnT w="9525" cap="flat" cmpd="sng" algn="ctr">
                       <a:solidFill>
-                        <a:srgbClr val="F5D4CC"/>
+                        <a:srgbClr val="F6DCD5"/>
                       </a:solidFill>
                       <a:prstDash val="solid"/>
                     </a:lnT>
                     <a:lnB w="9525" cap="flat" cmpd="sng" algn="ctr">
                       <a:solidFill>
-                        <a:srgbClr val="F5D4CC"/>
+                        <a:srgbClr val="F6DCD5"/>
                       </a:solidFill>
                       <a:prstDash val="solid"/>
                     </a:lnB>
                     <a:solidFill>
-                      <a:srgbClr val="FBF1EE"/>
+                      <a:srgbClr val="FBEFEC"/>
                     </a:solidFill>
                   </a:tcPr>
                 </a:tc>
@@ -5281,7 +5489,7 @@
                       <a:r>
                         <a:rPr sz="1400" b="0">
                           <a:solidFill>
-                            <a:srgbClr val="2B2B2B"/>
+                            <a:srgbClr val="26231F"/>
                           </a:solidFill>
                         </a:rPr>
                         <a:t/>
@@ -5291,30 +5499,30 @@
                   <a:tcPr anchor="ctr" marL="73152" marR="73152">
                     <a:lnL w="9525" cap="flat" cmpd="sng" algn="ctr">
                       <a:solidFill>
-                        <a:srgbClr val="F5D4CC"/>
+                        <a:srgbClr val="F6DCD5"/>
                       </a:solidFill>
                       <a:prstDash val="solid"/>
                     </a:lnL>
                     <a:lnR w="9525" cap="flat" cmpd="sng" algn="ctr">
                       <a:solidFill>
-                        <a:srgbClr val="F5D4CC"/>
+                        <a:srgbClr val="F6DCD5"/>
                       </a:solidFill>
                       <a:prstDash val="solid"/>
                     </a:lnR>
                     <a:lnT w="9525" cap="flat" cmpd="sng" algn="ctr">
                       <a:solidFill>
-                        <a:srgbClr val="F5D4CC"/>
+                        <a:srgbClr val="F6DCD5"/>
                       </a:solidFill>
                       <a:prstDash val="solid"/>
                     </a:lnT>
                     <a:lnB w="9525" cap="flat" cmpd="sng" algn="ctr">
                       <a:solidFill>
-                        <a:srgbClr val="F5D4CC"/>
+                        <a:srgbClr val="F6DCD5"/>
                       </a:solidFill>
                       <a:prstDash val="solid"/>
                     </a:lnB>
                     <a:solidFill>
-                      <a:srgbClr val="FBF1EE"/>
+                      <a:srgbClr val="FBEFEC"/>
                     </a:solidFill>
                   </a:tcPr>
                 </a:tc>
@@ -5329,7 +5537,7 @@
                       <a:r>
                         <a:rPr sz="1400" b="0">
                           <a:solidFill>
-                            <a:srgbClr val="2B2B2B"/>
+                            <a:srgbClr val="26231F"/>
                           </a:solidFill>
                         </a:rPr>
                         <a:t/>
@@ -5339,25 +5547,25 @@
                   <a:tcPr anchor="ctr" marL="73152" marR="73152">
                     <a:lnL w="9525" cap="flat" cmpd="sng" algn="ctr">
                       <a:solidFill>
-                        <a:srgbClr val="F5D4CC"/>
+                        <a:srgbClr val="F6DCD5"/>
                       </a:solidFill>
                       <a:prstDash val="solid"/>
                     </a:lnL>
                     <a:lnR w="9525" cap="flat" cmpd="sng" algn="ctr">
                       <a:solidFill>
-                        <a:srgbClr val="F5D4CC"/>
+                        <a:srgbClr val="F6DCD5"/>
                       </a:solidFill>
                       <a:prstDash val="solid"/>
                     </a:lnR>
                     <a:lnT w="9525" cap="flat" cmpd="sng" algn="ctr">
                       <a:solidFill>
-                        <a:srgbClr val="F5D4CC"/>
+                        <a:srgbClr val="F6DCD5"/>
                       </a:solidFill>
                       <a:prstDash val="solid"/>
                     </a:lnT>
                     <a:lnB w="9525" cap="flat" cmpd="sng" algn="ctr">
                       <a:solidFill>
-                        <a:srgbClr val="F5D4CC"/>
+                        <a:srgbClr val="F6DCD5"/>
                       </a:solidFill>
                       <a:prstDash val="solid"/>
                     </a:lnB>
@@ -5375,7 +5583,7 @@
                       <a:r>
                         <a:rPr sz="1400" b="0">
                           <a:solidFill>
-                            <a:srgbClr val="2B2B2B"/>
+                            <a:srgbClr val="26231F"/>
                           </a:solidFill>
                         </a:rPr>
                         <a:t/>
@@ -5385,25 +5593,25 @@
                   <a:tcPr anchor="ctr" marL="73152" marR="73152">
                     <a:lnL w="9525" cap="flat" cmpd="sng" algn="ctr">
                       <a:solidFill>
-                        <a:srgbClr val="F5D4CC"/>
+                        <a:srgbClr val="F6DCD5"/>
                       </a:solidFill>
                       <a:prstDash val="solid"/>
                     </a:lnL>
                     <a:lnR w="9525" cap="flat" cmpd="sng" algn="ctr">
                       <a:solidFill>
-                        <a:srgbClr val="F5D4CC"/>
+                        <a:srgbClr val="F6DCD5"/>
                       </a:solidFill>
                       <a:prstDash val="solid"/>
                     </a:lnR>
                     <a:lnT w="9525" cap="flat" cmpd="sng" algn="ctr">
                       <a:solidFill>
-                        <a:srgbClr val="F5D4CC"/>
+                        <a:srgbClr val="F6DCD5"/>
                       </a:solidFill>
                       <a:prstDash val="solid"/>
                     </a:lnT>
                     <a:lnB w="9525" cap="flat" cmpd="sng" algn="ctr">
                       <a:solidFill>
-                        <a:srgbClr val="F5D4CC"/>
+                        <a:srgbClr val="F6DCD5"/>
                       </a:solidFill>
                       <a:prstDash val="solid"/>
                     </a:lnB>
@@ -5421,7 +5629,7 @@
                       <a:r>
                         <a:rPr sz="1400" b="0">
                           <a:solidFill>
-                            <a:srgbClr val="2B2B2B"/>
+                            <a:srgbClr val="26231F"/>
                           </a:solidFill>
                         </a:rPr>
                         <a:t/>
@@ -5431,25 +5639,25 @@
                   <a:tcPr anchor="ctr" marL="73152" marR="73152">
                     <a:lnL w="9525" cap="flat" cmpd="sng" algn="ctr">
                       <a:solidFill>
-                        <a:srgbClr val="F5D4CC"/>
+                        <a:srgbClr val="F6DCD5"/>
                       </a:solidFill>
                       <a:prstDash val="solid"/>
                     </a:lnL>
                     <a:lnR w="9525" cap="flat" cmpd="sng" algn="ctr">
                       <a:solidFill>
-                        <a:srgbClr val="F5D4CC"/>
+                        <a:srgbClr val="F6DCD5"/>
                       </a:solidFill>
                       <a:prstDash val="solid"/>
                     </a:lnR>
                     <a:lnT w="9525" cap="flat" cmpd="sng" algn="ctr">
                       <a:solidFill>
-                        <a:srgbClr val="F5D4CC"/>
+                        <a:srgbClr val="F6DCD5"/>
                       </a:solidFill>
                       <a:prstDash val="solid"/>
                     </a:lnT>
                     <a:lnB w="9525" cap="flat" cmpd="sng" algn="ctr">
                       <a:solidFill>
-                        <a:srgbClr val="F5D4CC"/>
+                        <a:srgbClr val="F6DCD5"/>
                       </a:solidFill>
                       <a:prstDash val="solid"/>
                     </a:lnB>
@@ -5467,7 +5675,7 @@
                       <a:r>
                         <a:rPr sz="1400" b="0">
                           <a:solidFill>
-                            <a:srgbClr val="2B2B2B"/>
+                            <a:srgbClr val="26231F"/>
                           </a:solidFill>
                         </a:rPr>
                         <a:t/>
@@ -5477,25 +5685,25 @@
                   <a:tcPr anchor="ctr" marL="73152" marR="73152">
                     <a:lnL w="9525" cap="flat" cmpd="sng" algn="ctr">
                       <a:solidFill>
-                        <a:srgbClr val="F5D4CC"/>
+                        <a:srgbClr val="F6DCD5"/>
                       </a:solidFill>
                       <a:prstDash val="solid"/>
                     </a:lnL>
                     <a:lnR w="9525" cap="flat" cmpd="sng" algn="ctr">
                       <a:solidFill>
-                        <a:srgbClr val="F5D4CC"/>
+                        <a:srgbClr val="F6DCD5"/>
                       </a:solidFill>
                       <a:prstDash val="solid"/>
                     </a:lnR>
                     <a:lnT w="9525" cap="flat" cmpd="sng" algn="ctr">
                       <a:solidFill>
-                        <a:srgbClr val="F5D4CC"/>
+                        <a:srgbClr val="F6DCD5"/>
                       </a:solidFill>
                       <a:prstDash val="solid"/>
                     </a:lnT>
                     <a:lnB w="9525" cap="flat" cmpd="sng" algn="ctr">
                       <a:solidFill>
-                        <a:srgbClr val="F5D4CC"/>
+                        <a:srgbClr val="F6DCD5"/>
                       </a:solidFill>
                       <a:prstDash val="solid"/>
                     </a:lnB>
@@ -5513,7 +5721,7 @@
                       <a:r>
                         <a:rPr sz="1400" b="0">
                           <a:solidFill>
-                            <a:srgbClr val="2B2B2B"/>
+                            <a:srgbClr val="26231F"/>
                           </a:solidFill>
                         </a:rPr>
                         <a:t/>
@@ -5523,25 +5731,25 @@
                   <a:tcPr anchor="ctr" marL="73152" marR="73152">
                     <a:lnL w="9525" cap="flat" cmpd="sng" algn="ctr">
                       <a:solidFill>
-                        <a:srgbClr val="F5D4CC"/>
+                        <a:srgbClr val="F6DCD5"/>
                       </a:solidFill>
                       <a:prstDash val="solid"/>
                     </a:lnL>
                     <a:lnR w="9525" cap="flat" cmpd="sng" algn="ctr">
                       <a:solidFill>
-                        <a:srgbClr val="F5D4CC"/>
+                        <a:srgbClr val="F6DCD5"/>
                       </a:solidFill>
                       <a:prstDash val="solid"/>
                     </a:lnR>
                     <a:lnT w="9525" cap="flat" cmpd="sng" algn="ctr">
                       <a:solidFill>
-                        <a:srgbClr val="F5D4CC"/>
+                        <a:srgbClr val="F6DCD5"/>
                       </a:solidFill>
                       <a:prstDash val="solid"/>
                     </a:lnT>
                     <a:lnB w="9525" cap="flat" cmpd="sng" algn="ctr">
                       <a:solidFill>
-                        <a:srgbClr val="F5D4CC"/>
+                        <a:srgbClr val="F6DCD5"/>
                       </a:solidFill>
                       <a:prstDash val="solid"/>
                     </a:lnB>
@@ -5561,7 +5769,7 @@
                       <a:r>
                         <a:rPr sz="1400" b="0">
                           <a:solidFill>
-                            <a:srgbClr val="2B2B2B"/>
+                            <a:srgbClr val="26231F"/>
                           </a:solidFill>
                         </a:rPr>
                         <a:t/>
@@ -5571,30 +5779,30 @@
                   <a:tcPr anchor="ctr" marL="73152" marR="73152">
                     <a:lnL w="9525" cap="flat" cmpd="sng" algn="ctr">
                       <a:solidFill>
-                        <a:srgbClr val="F5D4CC"/>
+                        <a:srgbClr val="F6DCD5"/>
                       </a:solidFill>
                       <a:prstDash val="solid"/>
                     </a:lnL>
                     <a:lnR w="9525" cap="flat" cmpd="sng" algn="ctr">
                       <a:solidFill>
-                        <a:srgbClr val="F5D4CC"/>
+                        <a:srgbClr val="F6DCD5"/>
                       </a:solidFill>
                       <a:prstDash val="solid"/>
                     </a:lnR>
                     <a:lnT w="9525" cap="flat" cmpd="sng" algn="ctr">
                       <a:solidFill>
-                        <a:srgbClr val="F5D4CC"/>
+                        <a:srgbClr val="F6DCD5"/>
                       </a:solidFill>
                       <a:prstDash val="solid"/>
                     </a:lnT>
                     <a:lnB w="9525" cap="flat" cmpd="sng" algn="ctr">
                       <a:solidFill>
-                        <a:srgbClr val="F5D4CC"/>
+                        <a:srgbClr val="F6DCD5"/>
                       </a:solidFill>
                       <a:prstDash val="solid"/>
                     </a:lnB>
                     <a:solidFill>
-                      <a:srgbClr val="FBF1EE"/>
+                      <a:srgbClr val="FBEFEC"/>
                     </a:solidFill>
                   </a:tcPr>
                 </a:tc>
@@ -5607,7 +5815,7 @@
                       <a:r>
                         <a:rPr sz="1400" b="0">
                           <a:solidFill>
-                            <a:srgbClr val="2B2B2B"/>
+                            <a:srgbClr val="26231F"/>
                           </a:solidFill>
                         </a:rPr>
                         <a:t/>
@@ -5617,30 +5825,30 @@
                   <a:tcPr anchor="ctr" marL="73152" marR="73152">
                     <a:lnL w="9525" cap="flat" cmpd="sng" algn="ctr">
                       <a:solidFill>
-                        <a:srgbClr val="F5D4CC"/>
+                        <a:srgbClr val="F6DCD5"/>
                       </a:solidFill>
                       <a:prstDash val="solid"/>
                     </a:lnL>
                     <a:lnR w="9525" cap="flat" cmpd="sng" algn="ctr">
                       <a:solidFill>
-                        <a:srgbClr val="F5D4CC"/>
+                        <a:srgbClr val="F6DCD5"/>
                       </a:solidFill>
                       <a:prstDash val="solid"/>
                     </a:lnR>
                     <a:lnT w="9525" cap="flat" cmpd="sng" algn="ctr">
                       <a:solidFill>
-                        <a:srgbClr val="F5D4CC"/>
+                        <a:srgbClr val="F6DCD5"/>
                       </a:solidFill>
                       <a:prstDash val="solid"/>
                     </a:lnT>
                     <a:lnB w="9525" cap="flat" cmpd="sng" algn="ctr">
                       <a:solidFill>
-                        <a:srgbClr val="F5D4CC"/>
+                        <a:srgbClr val="F6DCD5"/>
                       </a:solidFill>
                       <a:prstDash val="solid"/>
                     </a:lnB>
                     <a:solidFill>
-                      <a:srgbClr val="FBF1EE"/>
+                      <a:srgbClr val="FBEFEC"/>
                     </a:solidFill>
                   </a:tcPr>
                 </a:tc>
@@ -5653,7 +5861,7 @@
                       <a:r>
                         <a:rPr sz="1400" b="0">
                           <a:solidFill>
-                            <a:srgbClr val="2B2B2B"/>
+                            <a:srgbClr val="26231F"/>
                           </a:solidFill>
                         </a:rPr>
                         <a:t/>
@@ -5663,30 +5871,30 @@
                   <a:tcPr anchor="ctr" marL="73152" marR="73152">
                     <a:lnL w="9525" cap="flat" cmpd="sng" algn="ctr">
                       <a:solidFill>
-                        <a:srgbClr val="F5D4CC"/>
+                        <a:srgbClr val="F6DCD5"/>
                       </a:solidFill>
                       <a:prstDash val="solid"/>
                     </a:lnL>
                     <a:lnR w="9525" cap="flat" cmpd="sng" algn="ctr">
                       <a:solidFill>
-                        <a:srgbClr val="F5D4CC"/>
+                        <a:srgbClr val="F6DCD5"/>
                       </a:solidFill>
                       <a:prstDash val="solid"/>
                     </a:lnR>
                     <a:lnT w="9525" cap="flat" cmpd="sng" algn="ctr">
                       <a:solidFill>
-                        <a:srgbClr val="F5D4CC"/>
+                        <a:srgbClr val="F6DCD5"/>
                       </a:solidFill>
                       <a:prstDash val="solid"/>
                     </a:lnT>
                     <a:lnB w="9525" cap="flat" cmpd="sng" algn="ctr">
                       <a:solidFill>
-                        <a:srgbClr val="F5D4CC"/>
+                        <a:srgbClr val="F6DCD5"/>
                       </a:solidFill>
                       <a:prstDash val="solid"/>
                     </a:lnB>
                     <a:solidFill>
-                      <a:srgbClr val="FBF1EE"/>
+                      <a:srgbClr val="FBEFEC"/>
                     </a:solidFill>
                   </a:tcPr>
                 </a:tc>
@@ -5699,7 +5907,7 @@
                       <a:r>
                         <a:rPr sz="1400" b="0">
                           <a:solidFill>
-                            <a:srgbClr val="2B2B2B"/>
+                            <a:srgbClr val="26231F"/>
                           </a:solidFill>
                         </a:rPr>
                         <a:t/>
@@ -5709,30 +5917,30 @@
                   <a:tcPr anchor="ctr" marL="73152" marR="73152">
                     <a:lnL w="9525" cap="flat" cmpd="sng" algn="ctr">
                       <a:solidFill>
-                        <a:srgbClr val="F5D4CC"/>
+                        <a:srgbClr val="F6DCD5"/>
                       </a:solidFill>
                       <a:prstDash val="solid"/>
                     </a:lnL>
                     <a:lnR w="9525" cap="flat" cmpd="sng" algn="ctr">
                       <a:solidFill>
-                        <a:srgbClr val="F5D4CC"/>
+                        <a:srgbClr val="F6DCD5"/>
                       </a:solidFill>
                       <a:prstDash val="solid"/>
                     </a:lnR>
                     <a:lnT w="9525" cap="flat" cmpd="sng" algn="ctr">
                       <a:solidFill>
-                        <a:srgbClr val="F5D4CC"/>
+                        <a:srgbClr val="F6DCD5"/>
                       </a:solidFill>
                       <a:prstDash val="solid"/>
                     </a:lnT>
                     <a:lnB w="9525" cap="flat" cmpd="sng" algn="ctr">
                       <a:solidFill>
-                        <a:srgbClr val="F5D4CC"/>
+                        <a:srgbClr val="F6DCD5"/>
                       </a:solidFill>
                       <a:prstDash val="solid"/>
                     </a:lnB>
                     <a:solidFill>
-                      <a:srgbClr val="FBF1EE"/>
+                      <a:srgbClr val="FBEFEC"/>
                     </a:solidFill>
                   </a:tcPr>
                 </a:tc>
@@ -5745,7 +5953,7 @@
                       <a:r>
                         <a:rPr sz="1400" b="0">
                           <a:solidFill>
-                            <a:srgbClr val="2B2B2B"/>
+                            <a:srgbClr val="26231F"/>
                           </a:solidFill>
                         </a:rPr>
                         <a:t/>
@@ -5755,30 +5963,30 @@
                   <a:tcPr anchor="ctr" marL="73152" marR="73152">
                     <a:lnL w="9525" cap="flat" cmpd="sng" algn="ctr">
                       <a:solidFill>
-                        <a:srgbClr val="F5D4CC"/>
+                        <a:srgbClr val="F6DCD5"/>
                       </a:solidFill>
                       <a:prstDash val="solid"/>
                     </a:lnL>
                     <a:lnR w="9525" cap="flat" cmpd="sng" algn="ctr">
                       <a:solidFill>
-                        <a:srgbClr val="F5D4CC"/>
+                        <a:srgbClr val="F6DCD5"/>
                       </a:solidFill>
                       <a:prstDash val="solid"/>
                     </a:lnR>
                     <a:lnT w="9525" cap="flat" cmpd="sng" algn="ctr">
                       <a:solidFill>
-                        <a:srgbClr val="F5D4CC"/>
+                        <a:srgbClr val="F6DCD5"/>
                       </a:solidFill>
                       <a:prstDash val="solid"/>
                     </a:lnT>
                     <a:lnB w="9525" cap="flat" cmpd="sng" algn="ctr">
                       <a:solidFill>
-                        <a:srgbClr val="F5D4CC"/>
+                        <a:srgbClr val="F6DCD5"/>
                       </a:solidFill>
                       <a:prstDash val="solid"/>
                     </a:lnB>
                     <a:solidFill>
-                      <a:srgbClr val="FBF1EE"/>
+                      <a:srgbClr val="FBEFEC"/>
                     </a:solidFill>
                   </a:tcPr>
                 </a:tc>
@@ -5801,7 +6009,7 @@
     <p:bg>
       <p:bgPr>
         <a:solidFill>
-          <a:srgbClr val="FBF1EE"/>
+          <a:srgbClr val="FBEFEC"/>
         </a:solidFill>
         <a:effectLst/>
       </p:bgPr>
@@ -5820,18 +6028,82 @@
           <p:nvPr/>
         </p:nvSpPr>
         <p:spPr>
-          <a:xfrm rot="10800000">
-            <a:off x="10637215" y="0"/>
-            <a:ext cx="914400" cy="1554480"/>
-          </a:xfrm>
-          <a:prstGeom prst="round2SameRect">
-            <a:avLst>
-              <a:gd name="adj1" fmla="val 50000"/>
-              <a:gd name="adj2" fmla="val 0"/>
-            </a:avLst>
+          <a:xfrm>
+            <a:off x="10180015" y="-1645920"/>
+            <a:ext cx="3474720" cy="3474720"/>
+          </a:xfrm>
+          <a:prstGeom prst="ellipse">
+            <a:avLst/>
           </a:prstGeom>
           <a:solidFill>
-            <a:srgbClr val="F5D4CC"/>
+            <a:srgbClr val="EBBAAD"/>
+          </a:solidFill>
+          <a:ln>
+            <a:noFill/>
+          </a:ln>
+        </p:spPr>
+        <p:txBody>
+          <a:bodyPr rtlCol="0" anchor="ctr"/>
+          <a:lstStyle/>
+          <a:p>
+            <a:pPr algn="ctr"/>
+          </a:p>
+        </p:txBody>
+      </p:sp>
+      <p:sp>
+        <p:nvSpPr>
+          <p:cNvPr id="4" name="상단 라벨"/>
+          <p:cNvSpPr txBox="1"/>
+          <p:nvPr/>
+        </p:nvSpPr>
+        <p:spPr>
+          <a:xfrm>
+            <a:off x="640080" y="274320"/>
+            <a:ext cx="5486400" cy="274320"/>
+          </a:xfrm>
+          <a:prstGeom prst="rect">
+            <a:avLst/>
+          </a:prstGeom>
+          <a:noFill/>
+        </p:spPr>
+        <p:txBody>
+          <a:bodyPr wrap="square" lIns="54864" rIns="54864" tIns="27432" bIns="27432" anchor="ctr">
+            <a:noAutofit/>
+          </a:bodyPr>
+          <a:lstStyle/>
+          <a:p>
+            <a:pPr algn="l">
+              <a:lnSpc>
+                <a:spcPct val="115000"/>
+              </a:lnSpc>
+            </a:pPr>
+            <a:r>
+              <a:rPr sz="900" b="1" i="0" spc="250">
+                <a:solidFill>
+                  <a:srgbClr val="26231F"/>
+                </a:solidFill>
+              </a:rPr>
+              <a:t>INSURANCE CHECK</a:t>
+            </a:r>
+          </a:p>
+        </p:txBody>
+      </p:sp>
+      <p:sp>
+        <p:nvSpPr>
+          <p:cNvPr id="5" name="포인트"/>
+          <p:cNvSpPr/>
+          <p:nvPr/>
+        </p:nvSpPr>
+        <p:spPr>
+          <a:xfrm>
+            <a:off x="11048695" y="502919"/>
+            <a:ext cx="274320" cy="274320"/>
+          </a:xfrm>
+          <a:prstGeom prst="donut">
+            <a:avLst/>
+          </a:prstGeom>
+          <a:solidFill>
+            <a:srgbClr val="FFFFFF"/>
           </a:solidFill>
           <a:ln>
             <a:noFill/>
@@ -5857,8 +6129,8 @@
         </p:nvSpPr>
         <p:spPr>
           <a:xfrm>
-            <a:off x="640080" y="457200"/>
-            <a:ext cx="9722815" cy="868680"/>
+            <a:off x="640080" y="658368"/>
+            <a:ext cx="9082735" cy="868680"/>
           </a:xfrm>
         </p:spPr>
         <p:txBody>
@@ -5875,7 +6147,7 @@
             <a:r>
               <a:rPr sz="3000" b="1" i="0">
                 <a:solidFill>
-                  <a:srgbClr val="5B2315"/>
+                  <a:srgbClr val="26231F"/>
                 </a:solidFill>
               </a:rPr>
               <a:t>보장 항목 체크</a:t>
@@ -5885,14 +6157,14 @@
       </p:sp>
       <p:graphicFrame>
         <p:nvGraphicFramePr>
-          <p:cNvPr id="4" name="표"/>
+          <p:cNvPr id="6" name="표"/>
           <p:cNvGraphicFramePr>
             <a:graphicFrameLocks noGrp="1"/>
           </p:cNvGraphicFramePr>
           <p:nvPr/>
         </p:nvGraphicFramePr>
         <p:xfrm>
-          <a:off x="640080" y="1600200"/>
+          <a:off x="640080" y="1783080"/>
           <a:ext cx="10911534" cy="4773168"/>
         </p:xfrm>
         <a:graphic>
@@ -5917,7 +6189,7 @@
                       <a:r>
                         <a:rPr sz="1400" b="1">
                           <a:solidFill>
-                            <a:srgbClr val="FFFFFF"/>
+                            <a:srgbClr val="26231F"/>
                           </a:solidFill>
                         </a:rPr>
                         <a:t>보장 항목</a:t>
@@ -5927,30 +6199,30 @@
                   <a:tcPr anchor="ctr" marL="73152" marR="73152">
                     <a:lnL w="9525" cap="flat" cmpd="sng" algn="ctr">
                       <a:solidFill>
-                        <a:srgbClr val="AE4329"/>
+                        <a:srgbClr val="D88C79"/>
                       </a:solidFill>
                       <a:prstDash val="solid"/>
                     </a:lnL>
                     <a:lnR w="9525" cap="flat" cmpd="sng" algn="ctr">
                       <a:solidFill>
-                        <a:srgbClr val="AE4329"/>
+                        <a:srgbClr val="D88C79"/>
                       </a:solidFill>
                       <a:prstDash val="solid"/>
                     </a:lnR>
                     <a:lnT w="9525" cap="flat" cmpd="sng" algn="ctr">
                       <a:solidFill>
-                        <a:srgbClr val="AE4329"/>
+                        <a:srgbClr val="D88C79"/>
                       </a:solidFill>
                       <a:prstDash val="solid"/>
                     </a:lnT>
                     <a:lnB w="9525" cap="flat" cmpd="sng" algn="ctr">
                       <a:solidFill>
-                        <a:srgbClr val="AE4329"/>
+                        <a:srgbClr val="D88C79"/>
                       </a:solidFill>
                       <a:prstDash val="solid"/>
                     </a:lnB>
                     <a:solidFill>
-                      <a:srgbClr val="AE4329"/>
+                      <a:srgbClr val="D88C79"/>
                     </a:solidFill>
                   </a:tcPr>
                 </a:tc>
@@ -5963,7 +6235,7 @@
                       <a:r>
                         <a:rPr sz="1400" b="1">
                           <a:solidFill>
-                            <a:srgbClr val="FFFFFF"/>
+                            <a:srgbClr val="26231F"/>
                           </a:solidFill>
                         </a:rPr>
                         <a:t>가입 확인</a:t>
@@ -5973,30 +6245,30 @@
                   <a:tcPr anchor="ctr" marL="73152" marR="73152">
                     <a:lnL w="9525" cap="flat" cmpd="sng" algn="ctr">
                       <a:solidFill>
-                        <a:srgbClr val="AE4329"/>
+                        <a:srgbClr val="D88C79"/>
                       </a:solidFill>
                       <a:prstDash val="solid"/>
                     </a:lnL>
                     <a:lnR w="9525" cap="flat" cmpd="sng" algn="ctr">
                       <a:solidFill>
-                        <a:srgbClr val="AE4329"/>
+                        <a:srgbClr val="D88C79"/>
                       </a:solidFill>
                       <a:prstDash val="solid"/>
                     </a:lnR>
                     <a:lnT w="9525" cap="flat" cmpd="sng" algn="ctr">
                       <a:solidFill>
-                        <a:srgbClr val="AE4329"/>
+                        <a:srgbClr val="D88C79"/>
                       </a:solidFill>
                       <a:prstDash val="solid"/>
                     </a:lnT>
                     <a:lnB w="9525" cap="flat" cmpd="sng" algn="ctr">
                       <a:solidFill>
-                        <a:srgbClr val="AE4329"/>
+                        <a:srgbClr val="D88C79"/>
                       </a:solidFill>
                       <a:prstDash val="solid"/>
                     </a:lnB>
                     <a:solidFill>
-                      <a:srgbClr val="AE4329"/>
+                      <a:srgbClr val="D88C79"/>
                     </a:solidFill>
                   </a:tcPr>
                 </a:tc>
@@ -6009,7 +6281,7 @@
                       <a:r>
                         <a:rPr sz="1400" b="1">
                           <a:solidFill>
-                            <a:srgbClr val="FFFFFF"/>
+                            <a:srgbClr val="26231F"/>
                           </a:solidFill>
                         </a:rPr>
                         <a:t>확인 필요</a:t>
@@ -6019,30 +6291,30 @@
                   <a:tcPr anchor="ctr" marL="73152" marR="73152">
                     <a:lnL w="9525" cap="flat" cmpd="sng" algn="ctr">
                       <a:solidFill>
-                        <a:srgbClr val="AE4329"/>
+                        <a:srgbClr val="D88C79"/>
                       </a:solidFill>
                       <a:prstDash val="solid"/>
                     </a:lnL>
                     <a:lnR w="9525" cap="flat" cmpd="sng" algn="ctr">
                       <a:solidFill>
-                        <a:srgbClr val="AE4329"/>
+                        <a:srgbClr val="D88C79"/>
                       </a:solidFill>
                       <a:prstDash val="solid"/>
                     </a:lnR>
                     <a:lnT w="9525" cap="flat" cmpd="sng" algn="ctr">
                       <a:solidFill>
-                        <a:srgbClr val="AE4329"/>
+                        <a:srgbClr val="D88C79"/>
                       </a:solidFill>
                       <a:prstDash val="solid"/>
                     </a:lnT>
                     <a:lnB w="9525" cap="flat" cmpd="sng" algn="ctr">
                       <a:solidFill>
-                        <a:srgbClr val="AE4329"/>
+                        <a:srgbClr val="D88C79"/>
                       </a:solidFill>
                       <a:prstDash val="solid"/>
                     </a:lnB>
                     <a:solidFill>
-                      <a:srgbClr val="AE4329"/>
+                      <a:srgbClr val="D88C79"/>
                     </a:solidFill>
                   </a:tcPr>
                 </a:tc>
@@ -6055,7 +6327,7 @@
                       <a:r>
                         <a:rPr sz="1400" b="1">
                           <a:solidFill>
-                            <a:srgbClr val="FFFFFF"/>
+                            <a:srgbClr val="26231F"/>
                           </a:solidFill>
                         </a:rPr>
                         <a:t>해당 없음</a:t>
@@ -6065,30 +6337,30 @@
                   <a:tcPr anchor="ctr" marL="73152" marR="73152">
                     <a:lnL w="9525" cap="flat" cmpd="sng" algn="ctr">
                       <a:solidFill>
-                        <a:srgbClr val="AE4329"/>
+                        <a:srgbClr val="D88C79"/>
                       </a:solidFill>
                       <a:prstDash val="solid"/>
                     </a:lnL>
                     <a:lnR w="9525" cap="flat" cmpd="sng" algn="ctr">
                       <a:solidFill>
-                        <a:srgbClr val="AE4329"/>
+                        <a:srgbClr val="D88C79"/>
                       </a:solidFill>
                       <a:prstDash val="solid"/>
                     </a:lnR>
                     <a:lnT w="9525" cap="flat" cmpd="sng" algn="ctr">
                       <a:solidFill>
-                        <a:srgbClr val="AE4329"/>
+                        <a:srgbClr val="D88C79"/>
                       </a:solidFill>
                       <a:prstDash val="solid"/>
                     </a:lnT>
                     <a:lnB w="9525" cap="flat" cmpd="sng" algn="ctr">
                       <a:solidFill>
-                        <a:srgbClr val="AE4329"/>
+                        <a:srgbClr val="D88C79"/>
                       </a:solidFill>
                       <a:prstDash val="solid"/>
                     </a:lnB>
                     <a:solidFill>
-                      <a:srgbClr val="AE4329"/>
+                      <a:srgbClr val="D88C79"/>
                     </a:solidFill>
                   </a:tcPr>
                 </a:tc>
@@ -6103,7 +6375,7 @@
                       <a:r>
                         <a:rPr sz="1400" b="1">
                           <a:solidFill>
-                            <a:srgbClr val="5B2315"/>
+                            <a:srgbClr val="492E27"/>
                           </a:solidFill>
                         </a:rPr>
                         <a:t>사망·재해</a:t>
@@ -6113,30 +6385,30 @@
                   <a:tcPr anchor="ctr" marL="73152" marR="73152">
                     <a:lnL w="9525" cap="flat" cmpd="sng" algn="ctr">
                       <a:solidFill>
-                        <a:srgbClr val="F5D4CC"/>
+                        <a:srgbClr val="F6DCD5"/>
                       </a:solidFill>
                       <a:prstDash val="solid"/>
                     </a:lnL>
                     <a:lnR w="9525" cap="flat" cmpd="sng" algn="ctr">
                       <a:solidFill>
-                        <a:srgbClr val="F5D4CC"/>
+                        <a:srgbClr val="F6DCD5"/>
                       </a:solidFill>
                       <a:prstDash val="solid"/>
                     </a:lnR>
                     <a:lnT w="9525" cap="flat" cmpd="sng" algn="ctr">
                       <a:solidFill>
-                        <a:srgbClr val="F5D4CC"/>
+                        <a:srgbClr val="F6DCD5"/>
                       </a:solidFill>
                       <a:prstDash val="solid"/>
                     </a:lnT>
                     <a:lnB w="9525" cap="flat" cmpd="sng" algn="ctr">
                       <a:solidFill>
-                        <a:srgbClr val="F5D4CC"/>
+                        <a:srgbClr val="F6DCD5"/>
                       </a:solidFill>
                       <a:prstDash val="solid"/>
                     </a:lnB>
                     <a:solidFill>
-                      <a:srgbClr val="F5D4CC"/>
+                      <a:srgbClr val="F6DCD5"/>
                     </a:solidFill>
                   </a:tcPr>
                 </a:tc>
@@ -6149,7 +6421,7 @@
                       <a:r>
                         <a:rPr sz="1400" b="0">
                           <a:solidFill>
-                            <a:srgbClr val="2B2B2B"/>
+                            <a:srgbClr val="26231F"/>
                           </a:solidFill>
                         </a:rPr>
                         <a:t>□</a:t>
@@ -6159,25 +6431,25 @@
                   <a:tcPr anchor="ctr" marL="73152" marR="73152">
                     <a:lnL w="9525" cap="flat" cmpd="sng" algn="ctr">
                       <a:solidFill>
-                        <a:srgbClr val="F5D4CC"/>
+                        <a:srgbClr val="F6DCD5"/>
                       </a:solidFill>
                       <a:prstDash val="solid"/>
                     </a:lnL>
                     <a:lnR w="9525" cap="flat" cmpd="sng" algn="ctr">
                       <a:solidFill>
-                        <a:srgbClr val="F5D4CC"/>
+                        <a:srgbClr val="F6DCD5"/>
                       </a:solidFill>
                       <a:prstDash val="solid"/>
                     </a:lnR>
                     <a:lnT w="9525" cap="flat" cmpd="sng" algn="ctr">
                       <a:solidFill>
-                        <a:srgbClr val="F5D4CC"/>
+                        <a:srgbClr val="F6DCD5"/>
                       </a:solidFill>
                       <a:prstDash val="solid"/>
                     </a:lnT>
                     <a:lnB w="9525" cap="flat" cmpd="sng" algn="ctr">
                       <a:solidFill>
-                        <a:srgbClr val="F5D4CC"/>
+                        <a:srgbClr val="F6DCD5"/>
                       </a:solidFill>
                       <a:prstDash val="solid"/>
                     </a:lnB>
@@ -6195,7 +6467,7 @@
                       <a:r>
                         <a:rPr sz="1400" b="0">
                           <a:solidFill>
-                            <a:srgbClr val="2B2B2B"/>
+                            <a:srgbClr val="26231F"/>
                           </a:solidFill>
                         </a:rPr>
                         <a:t>□</a:t>
@@ -6205,25 +6477,25 @@
                   <a:tcPr anchor="ctr" marL="73152" marR="73152">
                     <a:lnL w="9525" cap="flat" cmpd="sng" algn="ctr">
                       <a:solidFill>
-                        <a:srgbClr val="F5D4CC"/>
+                        <a:srgbClr val="F6DCD5"/>
                       </a:solidFill>
                       <a:prstDash val="solid"/>
                     </a:lnL>
                     <a:lnR w="9525" cap="flat" cmpd="sng" algn="ctr">
                       <a:solidFill>
-                        <a:srgbClr val="F5D4CC"/>
+                        <a:srgbClr val="F6DCD5"/>
                       </a:solidFill>
                       <a:prstDash val="solid"/>
                     </a:lnR>
                     <a:lnT w="9525" cap="flat" cmpd="sng" algn="ctr">
                       <a:solidFill>
-                        <a:srgbClr val="F5D4CC"/>
+                        <a:srgbClr val="F6DCD5"/>
                       </a:solidFill>
                       <a:prstDash val="solid"/>
                     </a:lnT>
                     <a:lnB w="9525" cap="flat" cmpd="sng" algn="ctr">
                       <a:solidFill>
-                        <a:srgbClr val="F5D4CC"/>
+                        <a:srgbClr val="F6DCD5"/>
                       </a:solidFill>
                       <a:prstDash val="solid"/>
                     </a:lnB>
@@ -6241,7 +6513,7 @@
                       <a:r>
                         <a:rPr sz="1400" b="0">
                           <a:solidFill>
-                            <a:srgbClr val="2B2B2B"/>
+                            <a:srgbClr val="26231F"/>
                           </a:solidFill>
                         </a:rPr>
                         <a:t>□</a:t>
@@ -6251,25 +6523,25 @@
                   <a:tcPr anchor="ctr" marL="73152" marR="73152">
                     <a:lnL w="9525" cap="flat" cmpd="sng" algn="ctr">
                       <a:solidFill>
-                        <a:srgbClr val="F5D4CC"/>
+                        <a:srgbClr val="F6DCD5"/>
                       </a:solidFill>
                       <a:prstDash val="solid"/>
                     </a:lnL>
                     <a:lnR w="9525" cap="flat" cmpd="sng" algn="ctr">
                       <a:solidFill>
-                        <a:srgbClr val="F5D4CC"/>
+                        <a:srgbClr val="F6DCD5"/>
                       </a:solidFill>
                       <a:prstDash val="solid"/>
                     </a:lnR>
                     <a:lnT w="9525" cap="flat" cmpd="sng" algn="ctr">
                       <a:solidFill>
-                        <a:srgbClr val="F5D4CC"/>
+                        <a:srgbClr val="F6DCD5"/>
                       </a:solidFill>
                       <a:prstDash val="solid"/>
                     </a:lnT>
                     <a:lnB w="9525" cap="flat" cmpd="sng" algn="ctr">
                       <a:solidFill>
-                        <a:srgbClr val="F5D4CC"/>
+                        <a:srgbClr val="F6DCD5"/>
                       </a:solidFill>
                       <a:prstDash val="solid"/>
                     </a:lnB>
@@ -6289,7 +6561,7 @@
                       <a:r>
                         <a:rPr sz="1400" b="1">
                           <a:solidFill>
-                            <a:srgbClr val="5B2315"/>
+                            <a:srgbClr val="492E27"/>
                           </a:solidFill>
                         </a:rPr>
                         <a:t>질병 진단</a:t>
@@ -6299,30 +6571,30 @@
                   <a:tcPr anchor="ctr" marL="73152" marR="73152">
                     <a:lnL w="9525" cap="flat" cmpd="sng" algn="ctr">
                       <a:solidFill>
-                        <a:srgbClr val="F5D4CC"/>
+                        <a:srgbClr val="F6DCD5"/>
                       </a:solidFill>
                       <a:prstDash val="solid"/>
                     </a:lnL>
                     <a:lnR w="9525" cap="flat" cmpd="sng" algn="ctr">
                       <a:solidFill>
-                        <a:srgbClr val="F5D4CC"/>
+                        <a:srgbClr val="F6DCD5"/>
                       </a:solidFill>
                       <a:prstDash val="solid"/>
                     </a:lnR>
                     <a:lnT w="9525" cap="flat" cmpd="sng" algn="ctr">
                       <a:solidFill>
-                        <a:srgbClr val="F5D4CC"/>
+                        <a:srgbClr val="F6DCD5"/>
                       </a:solidFill>
                       <a:prstDash val="solid"/>
                     </a:lnT>
                     <a:lnB w="9525" cap="flat" cmpd="sng" algn="ctr">
                       <a:solidFill>
-                        <a:srgbClr val="F5D4CC"/>
+                        <a:srgbClr val="F6DCD5"/>
                       </a:solidFill>
                       <a:prstDash val="solid"/>
                     </a:lnB>
                     <a:solidFill>
-                      <a:srgbClr val="F5D4CC"/>
+                      <a:srgbClr val="F6DCD5"/>
                     </a:solidFill>
                   </a:tcPr>
                 </a:tc>
@@ -6335,7 +6607,7 @@
                       <a:r>
                         <a:rPr sz="1400" b="0">
                           <a:solidFill>
-                            <a:srgbClr val="2B2B2B"/>
+                            <a:srgbClr val="26231F"/>
                           </a:solidFill>
                         </a:rPr>
                         <a:t>□</a:t>
@@ -6345,30 +6617,30 @@
                   <a:tcPr anchor="ctr" marL="73152" marR="73152">
                     <a:lnL w="9525" cap="flat" cmpd="sng" algn="ctr">
                       <a:solidFill>
-                        <a:srgbClr val="F5D4CC"/>
+                        <a:srgbClr val="F6DCD5"/>
                       </a:solidFill>
                       <a:prstDash val="solid"/>
                     </a:lnL>
                     <a:lnR w="9525" cap="flat" cmpd="sng" algn="ctr">
                       <a:solidFill>
-                        <a:srgbClr val="F5D4CC"/>
+                        <a:srgbClr val="F6DCD5"/>
                       </a:solidFill>
                       <a:prstDash val="solid"/>
                     </a:lnR>
                     <a:lnT w="9525" cap="flat" cmpd="sng" algn="ctr">
                       <a:solidFill>
-                        <a:srgbClr val="F5D4CC"/>
+                        <a:srgbClr val="F6DCD5"/>
                       </a:solidFill>
                       <a:prstDash val="solid"/>
                     </a:lnT>
                     <a:lnB w="9525" cap="flat" cmpd="sng" algn="ctr">
                       <a:solidFill>
-                        <a:srgbClr val="F5D4CC"/>
+                        <a:srgbClr val="F6DCD5"/>
                       </a:solidFill>
                       <a:prstDash val="solid"/>
                     </a:lnB>
                     <a:solidFill>
-                      <a:srgbClr val="FBF1EE"/>
+                      <a:srgbClr val="FBEFEC"/>
                     </a:solidFill>
                   </a:tcPr>
                 </a:tc>
@@ -6381,7 +6653,7 @@
                       <a:r>
                         <a:rPr sz="1400" b="0">
                           <a:solidFill>
-                            <a:srgbClr val="2B2B2B"/>
+                            <a:srgbClr val="26231F"/>
                           </a:solidFill>
                         </a:rPr>
                         <a:t>□</a:t>
@@ -6391,30 +6663,30 @@
                   <a:tcPr anchor="ctr" marL="73152" marR="73152">
                     <a:lnL w="9525" cap="flat" cmpd="sng" algn="ctr">
                       <a:solidFill>
-                        <a:srgbClr val="F5D4CC"/>
+                        <a:srgbClr val="F6DCD5"/>
                       </a:solidFill>
                       <a:prstDash val="solid"/>
                     </a:lnL>
                     <a:lnR w="9525" cap="flat" cmpd="sng" algn="ctr">
                       <a:solidFill>
-                        <a:srgbClr val="F5D4CC"/>
+                        <a:srgbClr val="F6DCD5"/>
                       </a:solidFill>
                       <a:prstDash val="solid"/>
                     </a:lnR>
                     <a:lnT w="9525" cap="flat" cmpd="sng" algn="ctr">
                       <a:solidFill>
-                        <a:srgbClr val="F5D4CC"/>
+                        <a:srgbClr val="F6DCD5"/>
                       </a:solidFill>
                       <a:prstDash val="solid"/>
                     </a:lnT>
                     <a:lnB w="9525" cap="flat" cmpd="sng" algn="ctr">
                       <a:solidFill>
-                        <a:srgbClr val="F5D4CC"/>
+                        <a:srgbClr val="F6DCD5"/>
                       </a:solidFill>
                       <a:prstDash val="solid"/>
                     </a:lnB>
                     <a:solidFill>
-                      <a:srgbClr val="FBF1EE"/>
+                      <a:srgbClr val="FBEFEC"/>
                     </a:solidFill>
                   </a:tcPr>
                 </a:tc>
@@ -6427,7 +6699,7 @@
                       <a:r>
                         <a:rPr sz="1400" b="0">
                           <a:solidFill>
-                            <a:srgbClr val="2B2B2B"/>
+                            <a:srgbClr val="26231F"/>
                           </a:solidFill>
                         </a:rPr>
                         <a:t>□</a:t>
@@ -6437,30 +6709,30 @@
                   <a:tcPr anchor="ctr" marL="73152" marR="73152">
                     <a:lnL w="9525" cap="flat" cmpd="sng" algn="ctr">
                       <a:solidFill>
-                        <a:srgbClr val="F5D4CC"/>
+                        <a:srgbClr val="F6DCD5"/>
                       </a:solidFill>
                       <a:prstDash val="solid"/>
                     </a:lnL>
                     <a:lnR w="9525" cap="flat" cmpd="sng" algn="ctr">
                       <a:solidFill>
-                        <a:srgbClr val="F5D4CC"/>
+                        <a:srgbClr val="F6DCD5"/>
                       </a:solidFill>
                       <a:prstDash val="solid"/>
                     </a:lnR>
                     <a:lnT w="9525" cap="flat" cmpd="sng" algn="ctr">
                       <a:solidFill>
-                        <a:srgbClr val="F5D4CC"/>
+                        <a:srgbClr val="F6DCD5"/>
                       </a:solidFill>
                       <a:prstDash val="solid"/>
                     </a:lnT>
                     <a:lnB w="9525" cap="flat" cmpd="sng" algn="ctr">
                       <a:solidFill>
-                        <a:srgbClr val="F5D4CC"/>
+                        <a:srgbClr val="F6DCD5"/>
                       </a:solidFill>
                       <a:prstDash val="solid"/>
                     </a:lnB>
                     <a:solidFill>
-                      <a:srgbClr val="FBF1EE"/>
+                      <a:srgbClr val="FBEFEC"/>
                     </a:solidFill>
                   </a:tcPr>
                 </a:tc>
@@ -6475,7 +6747,7 @@
                       <a:r>
                         <a:rPr sz="1400" b="1">
                           <a:solidFill>
-                            <a:srgbClr val="5B2315"/>
+                            <a:srgbClr val="492E27"/>
                           </a:solidFill>
                         </a:rPr>
                         <a:t>암</a:t>
@@ -6485,30 +6757,30 @@
                   <a:tcPr anchor="ctr" marL="73152" marR="73152">
                     <a:lnL w="9525" cap="flat" cmpd="sng" algn="ctr">
                       <a:solidFill>
-                        <a:srgbClr val="F5D4CC"/>
+                        <a:srgbClr val="F6DCD5"/>
                       </a:solidFill>
                       <a:prstDash val="solid"/>
                     </a:lnL>
                     <a:lnR w="9525" cap="flat" cmpd="sng" algn="ctr">
                       <a:solidFill>
-                        <a:srgbClr val="F5D4CC"/>
+                        <a:srgbClr val="F6DCD5"/>
                       </a:solidFill>
                       <a:prstDash val="solid"/>
                     </a:lnR>
                     <a:lnT w="9525" cap="flat" cmpd="sng" algn="ctr">
                       <a:solidFill>
-                        <a:srgbClr val="F5D4CC"/>
+                        <a:srgbClr val="F6DCD5"/>
                       </a:solidFill>
                       <a:prstDash val="solid"/>
                     </a:lnT>
                     <a:lnB w="9525" cap="flat" cmpd="sng" algn="ctr">
                       <a:solidFill>
-                        <a:srgbClr val="F5D4CC"/>
+                        <a:srgbClr val="F6DCD5"/>
                       </a:solidFill>
                       <a:prstDash val="solid"/>
                     </a:lnB>
                     <a:solidFill>
-                      <a:srgbClr val="F5D4CC"/>
+                      <a:srgbClr val="F6DCD5"/>
                     </a:solidFill>
                   </a:tcPr>
                 </a:tc>
@@ -6521,7 +6793,7 @@
                       <a:r>
                         <a:rPr sz="1400" b="0">
                           <a:solidFill>
-                            <a:srgbClr val="2B2B2B"/>
+                            <a:srgbClr val="26231F"/>
                           </a:solidFill>
                         </a:rPr>
                         <a:t>□</a:t>
@@ -6531,25 +6803,25 @@
                   <a:tcPr anchor="ctr" marL="73152" marR="73152">
                     <a:lnL w="9525" cap="flat" cmpd="sng" algn="ctr">
                       <a:solidFill>
-                        <a:srgbClr val="F5D4CC"/>
+                        <a:srgbClr val="F6DCD5"/>
                       </a:solidFill>
                       <a:prstDash val="solid"/>
                     </a:lnL>
                     <a:lnR w="9525" cap="flat" cmpd="sng" algn="ctr">
                       <a:solidFill>
-                        <a:srgbClr val="F5D4CC"/>
+                        <a:srgbClr val="F6DCD5"/>
                       </a:solidFill>
                       <a:prstDash val="solid"/>
                     </a:lnR>
                     <a:lnT w="9525" cap="flat" cmpd="sng" algn="ctr">
                       <a:solidFill>
-                        <a:srgbClr val="F5D4CC"/>
+                        <a:srgbClr val="F6DCD5"/>
                       </a:solidFill>
                       <a:prstDash val="solid"/>
                     </a:lnT>
                     <a:lnB w="9525" cap="flat" cmpd="sng" algn="ctr">
                       <a:solidFill>
-                        <a:srgbClr val="F5D4CC"/>
+                        <a:srgbClr val="F6DCD5"/>
                       </a:solidFill>
                       <a:prstDash val="solid"/>
                     </a:lnB>
@@ -6567,7 +6839,7 @@
                       <a:r>
                         <a:rPr sz="1400" b="0">
                           <a:solidFill>
-                            <a:srgbClr val="2B2B2B"/>
+                            <a:srgbClr val="26231F"/>
                           </a:solidFill>
                         </a:rPr>
                         <a:t>□</a:t>
@@ -6577,25 +6849,25 @@
                   <a:tcPr anchor="ctr" marL="73152" marR="73152">
                     <a:lnL w="9525" cap="flat" cmpd="sng" algn="ctr">
                       <a:solidFill>
-                        <a:srgbClr val="F5D4CC"/>
+                        <a:srgbClr val="F6DCD5"/>
                       </a:solidFill>
                       <a:prstDash val="solid"/>
                     </a:lnL>
                     <a:lnR w="9525" cap="flat" cmpd="sng" algn="ctr">
                       <a:solidFill>
-                        <a:srgbClr val="F5D4CC"/>
+                        <a:srgbClr val="F6DCD5"/>
                       </a:solidFill>
                       <a:prstDash val="solid"/>
                     </a:lnR>
                     <a:lnT w="9525" cap="flat" cmpd="sng" algn="ctr">
                       <a:solidFill>
-                        <a:srgbClr val="F5D4CC"/>
+                        <a:srgbClr val="F6DCD5"/>
                       </a:solidFill>
                       <a:prstDash val="solid"/>
                     </a:lnT>
                     <a:lnB w="9525" cap="flat" cmpd="sng" algn="ctr">
                       <a:solidFill>
-                        <a:srgbClr val="F5D4CC"/>
+                        <a:srgbClr val="F6DCD5"/>
                       </a:solidFill>
                       <a:prstDash val="solid"/>
                     </a:lnB>
@@ -6613,7 +6885,7 @@
                       <a:r>
                         <a:rPr sz="1400" b="0">
                           <a:solidFill>
-                            <a:srgbClr val="2B2B2B"/>
+                            <a:srgbClr val="26231F"/>
                           </a:solidFill>
                         </a:rPr>
                         <a:t>□</a:t>
@@ -6623,25 +6895,25 @@
                   <a:tcPr anchor="ctr" marL="73152" marR="73152">
                     <a:lnL w="9525" cap="flat" cmpd="sng" algn="ctr">
                       <a:solidFill>
-                        <a:srgbClr val="F5D4CC"/>
+                        <a:srgbClr val="F6DCD5"/>
                       </a:solidFill>
                       <a:prstDash val="solid"/>
                     </a:lnL>
                     <a:lnR w="9525" cap="flat" cmpd="sng" algn="ctr">
                       <a:solidFill>
-                        <a:srgbClr val="F5D4CC"/>
+                        <a:srgbClr val="F6DCD5"/>
                       </a:solidFill>
                       <a:prstDash val="solid"/>
                     </a:lnR>
                     <a:lnT w="9525" cap="flat" cmpd="sng" algn="ctr">
                       <a:solidFill>
-                        <a:srgbClr val="F5D4CC"/>
+                        <a:srgbClr val="F6DCD5"/>
                       </a:solidFill>
                       <a:prstDash val="solid"/>
                     </a:lnT>
                     <a:lnB w="9525" cap="flat" cmpd="sng" algn="ctr">
                       <a:solidFill>
-                        <a:srgbClr val="F5D4CC"/>
+                        <a:srgbClr val="F6DCD5"/>
                       </a:solidFill>
                       <a:prstDash val="solid"/>
                     </a:lnB>
@@ -6661,7 +6933,7 @@
                       <a:r>
                         <a:rPr sz="1400" b="1">
                           <a:solidFill>
-                            <a:srgbClr val="5B2315"/>
+                            <a:srgbClr val="492E27"/>
                           </a:solidFill>
                         </a:rPr>
                         <a:t>뇌·심장</a:t>
@@ -6671,30 +6943,30 @@
                   <a:tcPr anchor="ctr" marL="73152" marR="73152">
                     <a:lnL w="9525" cap="flat" cmpd="sng" algn="ctr">
                       <a:solidFill>
-                        <a:srgbClr val="F5D4CC"/>
+                        <a:srgbClr val="F6DCD5"/>
                       </a:solidFill>
                       <a:prstDash val="solid"/>
                     </a:lnL>
                     <a:lnR w="9525" cap="flat" cmpd="sng" algn="ctr">
                       <a:solidFill>
-                        <a:srgbClr val="F5D4CC"/>
+                        <a:srgbClr val="F6DCD5"/>
                       </a:solidFill>
                       <a:prstDash val="solid"/>
                     </a:lnR>
                     <a:lnT w="9525" cap="flat" cmpd="sng" algn="ctr">
                       <a:solidFill>
-                        <a:srgbClr val="F5D4CC"/>
+                        <a:srgbClr val="F6DCD5"/>
                       </a:solidFill>
                       <a:prstDash val="solid"/>
                     </a:lnT>
                     <a:lnB w="9525" cap="flat" cmpd="sng" algn="ctr">
                       <a:solidFill>
-                        <a:srgbClr val="F5D4CC"/>
+                        <a:srgbClr val="F6DCD5"/>
                       </a:solidFill>
                       <a:prstDash val="solid"/>
                     </a:lnB>
                     <a:solidFill>
-                      <a:srgbClr val="F5D4CC"/>
+                      <a:srgbClr val="F6DCD5"/>
                     </a:solidFill>
                   </a:tcPr>
                 </a:tc>
@@ -6707,7 +6979,7 @@
                       <a:r>
                         <a:rPr sz="1400" b="0">
                           <a:solidFill>
-                            <a:srgbClr val="2B2B2B"/>
+                            <a:srgbClr val="26231F"/>
                           </a:solidFill>
                         </a:rPr>
                         <a:t>□</a:t>
@@ -6717,30 +6989,30 @@
                   <a:tcPr anchor="ctr" marL="73152" marR="73152">
                     <a:lnL w="9525" cap="flat" cmpd="sng" algn="ctr">
                       <a:solidFill>
-                        <a:srgbClr val="F5D4CC"/>
+                        <a:srgbClr val="F6DCD5"/>
                       </a:solidFill>
                       <a:prstDash val="solid"/>
                     </a:lnL>
                     <a:lnR w="9525" cap="flat" cmpd="sng" algn="ctr">
                       <a:solidFill>
-                        <a:srgbClr val="F5D4CC"/>
+                        <a:srgbClr val="F6DCD5"/>
                       </a:solidFill>
                       <a:prstDash val="solid"/>
                     </a:lnR>
                     <a:lnT w="9525" cap="flat" cmpd="sng" algn="ctr">
                       <a:solidFill>
-                        <a:srgbClr val="F5D4CC"/>
+                        <a:srgbClr val="F6DCD5"/>
                       </a:solidFill>
                       <a:prstDash val="solid"/>
                     </a:lnT>
                     <a:lnB w="9525" cap="flat" cmpd="sng" algn="ctr">
                       <a:solidFill>
-                        <a:srgbClr val="F5D4CC"/>
+                        <a:srgbClr val="F6DCD5"/>
                       </a:solidFill>
                       <a:prstDash val="solid"/>
                     </a:lnB>
                     <a:solidFill>
-                      <a:srgbClr val="FBF1EE"/>
+                      <a:srgbClr val="FBEFEC"/>
                     </a:solidFill>
                   </a:tcPr>
                 </a:tc>
@@ -6753,7 +7025,7 @@
                       <a:r>
                         <a:rPr sz="1400" b="0">
                           <a:solidFill>
-                            <a:srgbClr val="2B2B2B"/>
+                            <a:srgbClr val="26231F"/>
                           </a:solidFill>
                         </a:rPr>
                         <a:t>□</a:t>
@@ -6763,30 +7035,30 @@
                   <a:tcPr anchor="ctr" marL="73152" marR="73152">
                     <a:lnL w="9525" cap="flat" cmpd="sng" algn="ctr">
                       <a:solidFill>
-                        <a:srgbClr val="F5D4CC"/>
+                        <a:srgbClr val="F6DCD5"/>
                       </a:solidFill>
                       <a:prstDash val="solid"/>
                     </a:lnL>
                     <a:lnR w="9525" cap="flat" cmpd="sng" algn="ctr">
                       <a:solidFill>
-                        <a:srgbClr val="F5D4CC"/>
+                        <a:srgbClr val="F6DCD5"/>
                       </a:solidFill>
                       <a:prstDash val="solid"/>
                     </a:lnR>
                     <a:lnT w="9525" cap="flat" cmpd="sng" algn="ctr">
                       <a:solidFill>
-                        <a:srgbClr val="F5D4CC"/>
+                        <a:srgbClr val="F6DCD5"/>
                       </a:solidFill>
                       <a:prstDash val="solid"/>
                     </a:lnT>
                     <a:lnB w="9525" cap="flat" cmpd="sng" algn="ctr">
                       <a:solidFill>
-                        <a:srgbClr val="F5D4CC"/>
+                        <a:srgbClr val="F6DCD5"/>
                       </a:solidFill>
                       <a:prstDash val="solid"/>
                     </a:lnB>
                     <a:solidFill>
-                      <a:srgbClr val="FBF1EE"/>
+                      <a:srgbClr val="FBEFEC"/>
                     </a:solidFill>
                   </a:tcPr>
                 </a:tc>
@@ -6799,7 +7071,7 @@
                       <a:r>
                         <a:rPr sz="1400" b="0">
                           <a:solidFill>
-                            <a:srgbClr val="2B2B2B"/>
+                            <a:srgbClr val="26231F"/>
                           </a:solidFill>
                         </a:rPr>
                         <a:t>□</a:t>
@@ -6809,30 +7081,30 @@
                   <a:tcPr anchor="ctr" marL="73152" marR="73152">
                     <a:lnL w="9525" cap="flat" cmpd="sng" algn="ctr">
                       <a:solidFill>
-                        <a:srgbClr val="F5D4CC"/>
+                        <a:srgbClr val="F6DCD5"/>
                       </a:solidFill>
                       <a:prstDash val="solid"/>
                     </a:lnL>
                     <a:lnR w="9525" cap="flat" cmpd="sng" algn="ctr">
                       <a:solidFill>
-                        <a:srgbClr val="F5D4CC"/>
+                        <a:srgbClr val="F6DCD5"/>
                       </a:solidFill>
                       <a:prstDash val="solid"/>
                     </a:lnR>
                     <a:lnT w="9525" cap="flat" cmpd="sng" algn="ctr">
                       <a:solidFill>
-                        <a:srgbClr val="F5D4CC"/>
+                        <a:srgbClr val="F6DCD5"/>
                       </a:solidFill>
                       <a:prstDash val="solid"/>
                     </a:lnT>
                     <a:lnB w="9525" cap="flat" cmpd="sng" algn="ctr">
                       <a:solidFill>
-                        <a:srgbClr val="F5D4CC"/>
+                        <a:srgbClr val="F6DCD5"/>
                       </a:solidFill>
                       <a:prstDash val="solid"/>
                     </a:lnB>
                     <a:solidFill>
-                      <a:srgbClr val="FBF1EE"/>
+                      <a:srgbClr val="FBEFEC"/>
                     </a:solidFill>
                   </a:tcPr>
                 </a:tc>
@@ -6847,7 +7119,7 @@
                       <a:r>
                         <a:rPr sz="1400" b="1">
                           <a:solidFill>
-                            <a:srgbClr val="5B2315"/>
+                            <a:srgbClr val="492E27"/>
                           </a:solidFill>
                         </a:rPr>
                         <a:t>입원·수술</a:t>
@@ -6857,30 +7129,30 @@
                   <a:tcPr anchor="ctr" marL="73152" marR="73152">
                     <a:lnL w="9525" cap="flat" cmpd="sng" algn="ctr">
                       <a:solidFill>
-                        <a:srgbClr val="F5D4CC"/>
+                        <a:srgbClr val="F6DCD5"/>
                       </a:solidFill>
                       <a:prstDash val="solid"/>
                     </a:lnL>
                     <a:lnR w="9525" cap="flat" cmpd="sng" algn="ctr">
                       <a:solidFill>
-                        <a:srgbClr val="F5D4CC"/>
+                        <a:srgbClr val="F6DCD5"/>
                       </a:solidFill>
                       <a:prstDash val="solid"/>
                     </a:lnR>
                     <a:lnT w="9525" cap="flat" cmpd="sng" algn="ctr">
                       <a:solidFill>
-                        <a:srgbClr val="F5D4CC"/>
+                        <a:srgbClr val="F6DCD5"/>
                       </a:solidFill>
                       <a:prstDash val="solid"/>
                     </a:lnT>
                     <a:lnB w="9525" cap="flat" cmpd="sng" algn="ctr">
                       <a:solidFill>
-                        <a:srgbClr val="F5D4CC"/>
+                        <a:srgbClr val="F6DCD5"/>
                       </a:solidFill>
                       <a:prstDash val="solid"/>
                     </a:lnB>
                     <a:solidFill>
-                      <a:srgbClr val="F5D4CC"/>
+                      <a:srgbClr val="F6DCD5"/>
                     </a:solidFill>
                   </a:tcPr>
                 </a:tc>
@@ -6893,7 +7165,7 @@
                       <a:r>
                         <a:rPr sz="1400" b="0">
                           <a:solidFill>
-                            <a:srgbClr val="2B2B2B"/>
+                            <a:srgbClr val="26231F"/>
                           </a:solidFill>
                         </a:rPr>
                         <a:t>□</a:t>
@@ -6903,25 +7175,25 @@
                   <a:tcPr anchor="ctr" marL="73152" marR="73152">
                     <a:lnL w="9525" cap="flat" cmpd="sng" algn="ctr">
                       <a:solidFill>
-                        <a:srgbClr val="F5D4CC"/>
+                        <a:srgbClr val="F6DCD5"/>
                       </a:solidFill>
                       <a:prstDash val="solid"/>
                     </a:lnL>
                     <a:lnR w="9525" cap="flat" cmpd="sng" algn="ctr">
                       <a:solidFill>
-                        <a:srgbClr val="F5D4CC"/>
+                        <a:srgbClr val="F6DCD5"/>
                       </a:solidFill>
                       <a:prstDash val="solid"/>
                     </a:lnR>
                     <a:lnT w="9525" cap="flat" cmpd="sng" algn="ctr">
                       <a:solidFill>
-                        <a:srgbClr val="F5D4CC"/>
+                        <a:srgbClr val="F6DCD5"/>
                       </a:solidFill>
                       <a:prstDash val="solid"/>
                     </a:lnT>
                     <a:lnB w="9525" cap="flat" cmpd="sng" algn="ctr">
                       <a:solidFill>
-                        <a:srgbClr val="F5D4CC"/>
+                        <a:srgbClr val="F6DCD5"/>
                       </a:solidFill>
                       <a:prstDash val="solid"/>
                     </a:lnB>
@@ -6939,7 +7211,7 @@
                       <a:r>
                         <a:rPr sz="1400" b="0">
                           <a:solidFill>
-                            <a:srgbClr val="2B2B2B"/>
+                            <a:srgbClr val="26231F"/>
                           </a:solidFill>
                         </a:rPr>
                         <a:t>□</a:t>
@@ -6949,25 +7221,25 @@
                   <a:tcPr anchor="ctr" marL="73152" marR="73152">
                     <a:lnL w="9525" cap="flat" cmpd="sng" algn="ctr">
                       <a:solidFill>
-                        <a:srgbClr val="F5D4CC"/>
+                        <a:srgbClr val="F6DCD5"/>
                       </a:solidFill>
                       <a:prstDash val="solid"/>
                     </a:lnL>
                     <a:lnR w="9525" cap="flat" cmpd="sng" algn="ctr">
                       <a:solidFill>
-                        <a:srgbClr val="F5D4CC"/>
+                        <a:srgbClr val="F6DCD5"/>
                       </a:solidFill>
                       <a:prstDash val="solid"/>
                     </a:lnR>
                     <a:lnT w="9525" cap="flat" cmpd="sng" algn="ctr">
                       <a:solidFill>
-                        <a:srgbClr val="F5D4CC"/>
+                        <a:srgbClr val="F6DCD5"/>
                       </a:solidFill>
                       <a:prstDash val="solid"/>
                     </a:lnT>
                     <a:lnB w="9525" cap="flat" cmpd="sng" algn="ctr">
                       <a:solidFill>
-                        <a:srgbClr val="F5D4CC"/>
+                        <a:srgbClr val="F6DCD5"/>
                       </a:solidFill>
                       <a:prstDash val="solid"/>
                     </a:lnB>
@@ -6985,7 +7257,7 @@
                       <a:r>
                         <a:rPr sz="1400" b="0">
                           <a:solidFill>
-                            <a:srgbClr val="2B2B2B"/>
+                            <a:srgbClr val="26231F"/>
                           </a:solidFill>
                         </a:rPr>
                         <a:t>□</a:t>
@@ -6995,25 +7267,25 @@
                   <a:tcPr anchor="ctr" marL="73152" marR="73152">
                     <a:lnL w="9525" cap="flat" cmpd="sng" algn="ctr">
                       <a:solidFill>
-                        <a:srgbClr val="F5D4CC"/>
+                        <a:srgbClr val="F6DCD5"/>
                       </a:solidFill>
                       <a:prstDash val="solid"/>
                     </a:lnL>
                     <a:lnR w="9525" cap="flat" cmpd="sng" algn="ctr">
                       <a:solidFill>
-                        <a:srgbClr val="F5D4CC"/>
+                        <a:srgbClr val="F6DCD5"/>
                       </a:solidFill>
                       <a:prstDash val="solid"/>
                     </a:lnR>
                     <a:lnT w="9525" cap="flat" cmpd="sng" algn="ctr">
                       <a:solidFill>
-                        <a:srgbClr val="F5D4CC"/>
+                        <a:srgbClr val="F6DCD5"/>
                       </a:solidFill>
                       <a:prstDash val="solid"/>
                     </a:lnT>
                     <a:lnB w="9525" cap="flat" cmpd="sng" algn="ctr">
                       <a:solidFill>
-                        <a:srgbClr val="F5D4CC"/>
+                        <a:srgbClr val="F6DCD5"/>
                       </a:solidFill>
                       <a:prstDash val="solid"/>
                     </a:lnB>
@@ -7033,7 +7305,7 @@
                       <a:r>
                         <a:rPr sz="1400" b="1">
                           <a:solidFill>
-                            <a:srgbClr val="5B2315"/>
+                            <a:srgbClr val="492E27"/>
                           </a:solidFill>
                         </a:rPr>
                         <a:t>상해</a:t>
@@ -7043,30 +7315,30 @@
                   <a:tcPr anchor="ctr" marL="73152" marR="73152">
                     <a:lnL w="9525" cap="flat" cmpd="sng" algn="ctr">
                       <a:solidFill>
-                        <a:srgbClr val="F5D4CC"/>
+                        <a:srgbClr val="F6DCD5"/>
                       </a:solidFill>
                       <a:prstDash val="solid"/>
                     </a:lnL>
                     <a:lnR w="9525" cap="flat" cmpd="sng" algn="ctr">
                       <a:solidFill>
-                        <a:srgbClr val="F5D4CC"/>
+                        <a:srgbClr val="F6DCD5"/>
                       </a:solidFill>
                       <a:prstDash val="solid"/>
                     </a:lnR>
                     <a:lnT w="9525" cap="flat" cmpd="sng" algn="ctr">
                       <a:solidFill>
-                        <a:srgbClr val="F5D4CC"/>
+                        <a:srgbClr val="F6DCD5"/>
                       </a:solidFill>
                       <a:prstDash val="solid"/>
                     </a:lnT>
                     <a:lnB w="9525" cap="flat" cmpd="sng" algn="ctr">
                       <a:solidFill>
-                        <a:srgbClr val="F5D4CC"/>
+                        <a:srgbClr val="F6DCD5"/>
                       </a:solidFill>
                       <a:prstDash val="solid"/>
                     </a:lnB>
                     <a:solidFill>
-                      <a:srgbClr val="F5D4CC"/>
+                      <a:srgbClr val="F6DCD5"/>
                     </a:solidFill>
                   </a:tcPr>
                 </a:tc>
@@ -7079,7 +7351,7 @@
                       <a:r>
                         <a:rPr sz="1400" b="0">
                           <a:solidFill>
-                            <a:srgbClr val="2B2B2B"/>
+                            <a:srgbClr val="26231F"/>
                           </a:solidFill>
                         </a:rPr>
                         <a:t>□</a:t>
@@ -7089,30 +7361,30 @@
                   <a:tcPr anchor="ctr" marL="73152" marR="73152">
                     <a:lnL w="9525" cap="flat" cmpd="sng" algn="ctr">
                       <a:solidFill>
-                        <a:srgbClr val="F5D4CC"/>
+                        <a:srgbClr val="F6DCD5"/>
                       </a:solidFill>
                       <a:prstDash val="solid"/>
                     </a:lnL>
                     <a:lnR w="9525" cap="flat" cmpd="sng" algn="ctr">
                       <a:solidFill>
-                        <a:srgbClr val="F5D4CC"/>
+                        <a:srgbClr val="F6DCD5"/>
                       </a:solidFill>
                       <a:prstDash val="solid"/>
                     </a:lnR>
                     <a:lnT w="9525" cap="flat" cmpd="sng" algn="ctr">
                       <a:solidFill>
-                        <a:srgbClr val="F5D4CC"/>
+                        <a:srgbClr val="F6DCD5"/>
                       </a:solidFill>
                       <a:prstDash val="solid"/>
                     </a:lnT>
                     <a:lnB w="9525" cap="flat" cmpd="sng" algn="ctr">
                       <a:solidFill>
-                        <a:srgbClr val="F5D4CC"/>
+                        <a:srgbClr val="F6DCD5"/>
                       </a:solidFill>
                       <a:prstDash val="solid"/>
                     </a:lnB>
                     <a:solidFill>
-                      <a:srgbClr val="FBF1EE"/>
+                      <a:srgbClr val="FBEFEC"/>
                     </a:solidFill>
                   </a:tcPr>
                 </a:tc>
@@ -7125,7 +7397,7 @@
                       <a:r>
                         <a:rPr sz="1400" b="0">
                           <a:solidFill>
-                            <a:srgbClr val="2B2B2B"/>
+                            <a:srgbClr val="26231F"/>
                           </a:solidFill>
                         </a:rPr>
                         <a:t>□</a:t>
@@ -7135,30 +7407,30 @@
                   <a:tcPr anchor="ctr" marL="73152" marR="73152">
                     <a:lnL w="9525" cap="flat" cmpd="sng" algn="ctr">
                       <a:solidFill>
-                        <a:srgbClr val="F5D4CC"/>
+                        <a:srgbClr val="F6DCD5"/>
                       </a:solidFill>
                       <a:prstDash val="solid"/>
                     </a:lnL>
                     <a:lnR w="9525" cap="flat" cmpd="sng" algn="ctr">
                       <a:solidFill>
-                        <a:srgbClr val="F5D4CC"/>
+                        <a:srgbClr val="F6DCD5"/>
                       </a:solidFill>
                       <a:prstDash val="solid"/>
                     </a:lnR>
                     <a:lnT w="9525" cap="flat" cmpd="sng" algn="ctr">
                       <a:solidFill>
-                        <a:srgbClr val="F5D4CC"/>
+                        <a:srgbClr val="F6DCD5"/>
                       </a:solidFill>
                       <a:prstDash val="solid"/>
                     </a:lnT>
                     <a:lnB w="9525" cap="flat" cmpd="sng" algn="ctr">
                       <a:solidFill>
-                        <a:srgbClr val="F5D4CC"/>
+                        <a:srgbClr val="F6DCD5"/>
                       </a:solidFill>
                       <a:prstDash val="solid"/>
                     </a:lnB>
                     <a:solidFill>
-                      <a:srgbClr val="FBF1EE"/>
+                      <a:srgbClr val="FBEFEC"/>
                     </a:solidFill>
                   </a:tcPr>
                 </a:tc>
@@ -7171,7 +7443,7 @@
                       <a:r>
                         <a:rPr sz="1400" b="0">
                           <a:solidFill>
-                            <a:srgbClr val="2B2B2B"/>
+                            <a:srgbClr val="26231F"/>
                           </a:solidFill>
                         </a:rPr>
                         <a:t>□</a:t>
@@ -7181,30 +7453,30 @@
                   <a:tcPr anchor="ctr" marL="73152" marR="73152">
                     <a:lnL w="9525" cap="flat" cmpd="sng" algn="ctr">
                       <a:solidFill>
-                        <a:srgbClr val="F5D4CC"/>
+                        <a:srgbClr val="F6DCD5"/>
                       </a:solidFill>
                       <a:prstDash val="solid"/>
                     </a:lnL>
                     <a:lnR w="9525" cap="flat" cmpd="sng" algn="ctr">
                       <a:solidFill>
-                        <a:srgbClr val="F5D4CC"/>
+                        <a:srgbClr val="F6DCD5"/>
                       </a:solidFill>
                       <a:prstDash val="solid"/>
                     </a:lnR>
                     <a:lnT w="9525" cap="flat" cmpd="sng" algn="ctr">
                       <a:solidFill>
-                        <a:srgbClr val="F5D4CC"/>
+                        <a:srgbClr val="F6DCD5"/>
                       </a:solidFill>
                       <a:prstDash val="solid"/>
                     </a:lnT>
                     <a:lnB w="9525" cap="flat" cmpd="sng" algn="ctr">
                       <a:solidFill>
-                        <a:srgbClr val="F5D4CC"/>
+                        <a:srgbClr val="F6DCD5"/>
                       </a:solidFill>
                       <a:prstDash val="solid"/>
                     </a:lnB>
                     <a:solidFill>
-                      <a:srgbClr val="FBF1EE"/>
+                      <a:srgbClr val="FBEFEC"/>
                     </a:solidFill>
                   </a:tcPr>
                 </a:tc>
@@ -7219,7 +7491,7 @@
                       <a:r>
                         <a:rPr sz="1400" b="1">
                           <a:solidFill>
-                            <a:srgbClr val="5B2315"/>
+                            <a:srgbClr val="492E27"/>
                           </a:solidFill>
                         </a:rPr>
                         <a:t>실손의료</a:t>
@@ -7229,30 +7501,30 @@
                   <a:tcPr anchor="ctr" marL="73152" marR="73152">
                     <a:lnL w="9525" cap="flat" cmpd="sng" algn="ctr">
                       <a:solidFill>
-                        <a:srgbClr val="F5D4CC"/>
+                        <a:srgbClr val="F6DCD5"/>
                       </a:solidFill>
                       <a:prstDash val="solid"/>
                     </a:lnL>
                     <a:lnR w="9525" cap="flat" cmpd="sng" algn="ctr">
                       <a:solidFill>
-                        <a:srgbClr val="F5D4CC"/>
+                        <a:srgbClr val="F6DCD5"/>
                       </a:solidFill>
                       <a:prstDash val="solid"/>
                     </a:lnR>
                     <a:lnT w="9525" cap="flat" cmpd="sng" algn="ctr">
                       <a:solidFill>
-                        <a:srgbClr val="F5D4CC"/>
+                        <a:srgbClr val="F6DCD5"/>
                       </a:solidFill>
                       <a:prstDash val="solid"/>
                     </a:lnT>
                     <a:lnB w="9525" cap="flat" cmpd="sng" algn="ctr">
                       <a:solidFill>
-                        <a:srgbClr val="F5D4CC"/>
+                        <a:srgbClr val="F6DCD5"/>
                       </a:solidFill>
                       <a:prstDash val="solid"/>
                     </a:lnB>
                     <a:solidFill>
-                      <a:srgbClr val="F5D4CC"/>
+                      <a:srgbClr val="F6DCD5"/>
                     </a:solidFill>
                   </a:tcPr>
                 </a:tc>
@@ -7265,7 +7537,7 @@
                       <a:r>
                         <a:rPr sz="1400" b="0">
                           <a:solidFill>
-                            <a:srgbClr val="2B2B2B"/>
+                            <a:srgbClr val="26231F"/>
                           </a:solidFill>
                         </a:rPr>
                         <a:t>□</a:t>
@@ -7275,25 +7547,25 @@
                   <a:tcPr anchor="ctr" marL="73152" marR="73152">
                     <a:lnL w="9525" cap="flat" cmpd="sng" algn="ctr">
                       <a:solidFill>
-                        <a:srgbClr val="F5D4CC"/>
+                        <a:srgbClr val="F6DCD5"/>
                       </a:solidFill>
                       <a:prstDash val="solid"/>
                     </a:lnL>
                     <a:lnR w="9525" cap="flat" cmpd="sng" algn="ctr">
                       <a:solidFill>
-                        <a:srgbClr val="F5D4CC"/>
+                        <a:srgbClr val="F6DCD5"/>
                       </a:solidFill>
                       <a:prstDash val="solid"/>
                     </a:lnR>
                     <a:lnT w="9525" cap="flat" cmpd="sng" algn="ctr">
                       <a:solidFill>
-                        <a:srgbClr val="F5D4CC"/>
+                        <a:srgbClr val="F6DCD5"/>
                       </a:solidFill>
                       <a:prstDash val="solid"/>
                     </a:lnT>
                     <a:lnB w="9525" cap="flat" cmpd="sng" algn="ctr">
                       <a:solidFill>
-                        <a:srgbClr val="F5D4CC"/>
+                        <a:srgbClr val="F6DCD5"/>
                       </a:solidFill>
                       <a:prstDash val="solid"/>
                     </a:lnB>
@@ -7311,7 +7583,7 @@
                       <a:r>
                         <a:rPr sz="1400" b="0">
                           <a:solidFill>
-                            <a:srgbClr val="2B2B2B"/>
+                            <a:srgbClr val="26231F"/>
                           </a:solidFill>
                         </a:rPr>
                         <a:t>□</a:t>
@@ -7321,25 +7593,25 @@
                   <a:tcPr anchor="ctr" marL="73152" marR="73152">
                     <a:lnL w="9525" cap="flat" cmpd="sng" algn="ctr">
                       <a:solidFill>
-                        <a:srgbClr val="F5D4CC"/>
+                        <a:srgbClr val="F6DCD5"/>
                       </a:solidFill>
                       <a:prstDash val="solid"/>
                     </a:lnL>
                     <a:lnR w="9525" cap="flat" cmpd="sng" algn="ctr">
                       <a:solidFill>
-                        <a:srgbClr val="F5D4CC"/>
+                        <a:srgbClr val="F6DCD5"/>
                       </a:solidFill>
                       <a:prstDash val="solid"/>
                     </a:lnR>
                     <a:lnT w="9525" cap="flat" cmpd="sng" algn="ctr">
                       <a:solidFill>
-                        <a:srgbClr val="F5D4CC"/>
+                        <a:srgbClr val="F6DCD5"/>
                       </a:solidFill>
                       <a:prstDash val="solid"/>
                     </a:lnT>
                     <a:lnB w="9525" cap="flat" cmpd="sng" algn="ctr">
                       <a:solidFill>
-                        <a:srgbClr val="F5D4CC"/>
+                        <a:srgbClr val="F6DCD5"/>
                       </a:solidFill>
                       <a:prstDash val="solid"/>
                     </a:lnB>
@@ -7357,7 +7629,7 @@
                       <a:r>
                         <a:rPr sz="1400" b="0">
                           <a:solidFill>
-                            <a:srgbClr val="2B2B2B"/>
+                            <a:srgbClr val="26231F"/>
                           </a:solidFill>
                         </a:rPr>
                         <a:t>□</a:t>
@@ -7367,25 +7639,25 @@
                   <a:tcPr anchor="ctr" marL="73152" marR="73152">
                     <a:lnL w="9525" cap="flat" cmpd="sng" algn="ctr">
                       <a:solidFill>
-                        <a:srgbClr val="F5D4CC"/>
+                        <a:srgbClr val="F6DCD5"/>
                       </a:solidFill>
                       <a:prstDash val="solid"/>
                     </a:lnL>
                     <a:lnR w="9525" cap="flat" cmpd="sng" algn="ctr">
                       <a:solidFill>
-                        <a:srgbClr val="F5D4CC"/>
+                        <a:srgbClr val="F6DCD5"/>
                       </a:solidFill>
                       <a:prstDash val="solid"/>
                     </a:lnR>
                     <a:lnT w="9525" cap="flat" cmpd="sng" algn="ctr">
                       <a:solidFill>
-                        <a:srgbClr val="F5D4CC"/>
+                        <a:srgbClr val="F6DCD5"/>
                       </a:solidFill>
                       <a:prstDash val="solid"/>
                     </a:lnT>
                     <a:lnB w="9525" cap="flat" cmpd="sng" algn="ctr">
                       <a:solidFill>
-                        <a:srgbClr val="F5D4CC"/>
+                        <a:srgbClr val="F6DCD5"/>
                       </a:solidFill>
                       <a:prstDash val="solid"/>
                     </a:lnB>
@@ -7405,7 +7677,7 @@
                       <a:r>
                         <a:rPr sz="1400" b="1">
                           <a:solidFill>
-                            <a:srgbClr val="5B2315"/>
+                            <a:srgbClr val="492E27"/>
                           </a:solidFill>
                         </a:rPr>
                         <a:t>연금·노후자금</a:t>
@@ -7415,30 +7687,30 @@
                   <a:tcPr anchor="ctr" marL="73152" marR="73152">
                     <a:lnL w="9525" cap="flat" cmpd="sng" algn="ctr">
                       <a:solidFill>
-                        <a:srgbClr val="F5D4CC"/>
+                        <a:srgbClr val="F6DCD5"/>
                       </a:solidFill>
                       <a:prstDash val="solid"/>
                     </a:lnL>
                     <a:lnR w="9525" cap="flat" cmpd="sng" algn="ctr">
                       <a:solidFill>
-                        <a:srgbClr val="F5D4CC"/>
+                        <a:srgbClr val="F6DCD5"/>
                       </a:solidFill>
                       <a:prstDash val="solid"/>
                     </a:lnR>
                     <a:lnT w="9525" cap="flat" cmpd="sng" algn="ctr">
                       <a:solidFill>
-                        <a:srgbClr val="F5D4CC"/>
+                        <a:srgbClr val="F6DCD5"/>
                       </a:solidFill>
                       <a:prstDash val="solid"/>
                     </a:lnT>
                     <a:lnB w="9525" cap="flat" cmpd="sng" algn="ctr">
                       <a:solidFill>
-                        <a:srgbClr val="F5D4CC"/>
+                        <a:srgbClr val="F6DCD5"/>
                       </a:solidFill>
                       <a:prstDash val="solid"/>
                     </a:lnB>
                     <a:solidFill>
-                      <a:srgbClr val="F5D4CC"/>
+                      <a:srgbClr val="F6DCD5"/>
                     </a:solidFill>
                   </a:tcPr>
                 </a:tc>
@@ -7451,7 +7723,7 @@
                       <a:r>
                         <a:rPr sz="1400" b="0">
                           <a:solidFill>
-                            <a:srgbClr val="2B2B2B"/>
+                            <a:srgbClr val="26231F"/>
                           </a:solidFill>
                         </a:rPr>
                         <a:t>□</a:t>
@@ -7461,30 +7733,30 @@
                   <a:tcPr anchor="ctr" marL="73152" marR="73152">
                     <a:lnL w="9525" cap="flat" cmpd="sng" algn="ctr">
                       <a:solidFill>
-                        <a:srgbClr val="F5D4CC"/>
+                        <a:srgbClr val="F6DCD5"/>
                       </a:solidFill>
                       <a:prstDash val="solid"/>
                     </a:lnL>
                     <a:lnR w="9525" cap="flat" cmpd="sng" algn="ctr">
                       <a:solidFill>
-                        <a:srgbClr val="F5D4CC"/>
+                        <a:srgbClr val="F6DCD5"/>
                       </a:solidFill>
                       <a:prstDash val="solid"/>
                     </a:lnR>
                     <a:lnT w="9525" cap="flat" cmpd="sng" algn="ctr">
                       <a:solidFill>
-                        <a:srgbClr val="F5D4CC"/>
+                        <a:srgbClr val="F6DCD5"/>
                       </a:solidFill>
                       <a:prstDash val="solid"/>
                     </a:lnT>
                     <a:lnB w="9525" cap="flat" cmpd="sng" algn="ctr">
                       <a:solidFill>
-                        <a:srgbClr val="F5D4CC"/>
+                        <a:srgbClr val="F6DCD5"/>
                       </a:solidFill>
                       <a:prstDash val="solid"/>
                     </a:lnB>
                     <a:solidFill>
-                      <a:srgbClr val="FBF1EE"/>
+                      <a:srgbClr val="FBEFEC"/>
                     </a:solidFill>
                   </a:tcPr>
                 </a:tc>
@@ -7497,7 +7769,7 @@
                       <a:r>
                         <a:rPr sz="1400" b="0">
                           <a:solidFill>
-                            <a:srgbClr val="2B2B2B"/>
+                            <a:srgbClr val="26231F"/>
                           </a:solidFill>
                         </a:rPr>
                         <a:t>□</a:t>
@@ -7507,30 +7779,30 @@
                   <a:tcPr anchor="ctr" marL="73152" marR="73152">
                     <a:lnL w="9525" cap="flat" cmpd="sng" algn="ctr">
                       <a:solidFill>
-                        <a:srgbClr val="F5D4CC"/>
+                        <a:srgbClr val="F6DCD5"/>
                       </a:solidFill>
                       <a:prstDash val="solid"/>
                     </a:lnL>
                     <a:lnR w="9525" cap="flat" cmpd="sng" algn="ctr">
                       <a:solidFill>
-                        <a:srgbClr val="F5D4CC"/>
+                        <a:srgbClr val="F6DCD5"/>
                       </a:solidFill>
                       <a:prstDash val="solid"/>
                     </a:lnR>
                     <a:lnT w="9525" cap="flat" cmpd="sng" algn="ctr">
                       <a:solidFill>
-                        <a:srgbClr val="F5D4CC"/>
+                        <a:srgbClr val="F6DCD5"/>
                       </a:solidFill>
                       <a:prstDash val="solid"/>
                     </a:lnT>
                     <a:lnB w="9525" cap="flat" cmpd="sng" algn="ctr">
                       <a:solidFill>
-                        <a:srgbClr val="F5D4CC"/>
+                        <a:srgbClr val="F6DCD5"/>
                       </a:solidFill>
                       <a:prstDash val="solid"/>
                     </a:lnB>
                     <a:solidFill>
-                      <a:srgbClr val="FBF1EE"/>
+                      <a:srgbClr val="FBEFEC"/>
                     </a:solidFill>
                   </a:tcPr>
                 </a:tc>
@@ -7543,7 +7815,7 @@
                       <a:r>
                         <a:rPr sz="1400" b="0">
                           <a:solidFill>
-                            <a:srgbClr val="2B2B2B"/>
+                            <a:srgbClr val="26231F"/>
                           </a:solidFill>
                         </a:rPr>
                         <a:t>□</a:t>
@@ -7553,30 +7825,30 @@
                   <a:tcPr anchor="ctr" marL="73152" marR="73152">
                     <a:lnL w="9525" cap="flat" cmpd="sng" algn="ctr">
                       <a:solidFill>
-                        <a:srgbClr val="F5D4CC"/>
+                        <a:srgbClr val="F6DCD5"/>
                       </a:solidFill>
                       <a:prstDash val="solid"/>
                     </a:lnL>
                     <a:lnR w="9525" cap="flat" cmpd="sng" algn="ctr">
                       <a:solidFill>
-                        <a:srgbClr val="F5D4CC"/>
+                        <a:srgbClr val="F6DCD5"/>
                       </a:solidFill>
                       <a:prstDash val="solid"/>
                     </a:lnR>
                     <a:lnT w="9525" cap="flat" cmpd="sng" algn="ctr">
                       <a:solidFill>
-                        <a:srgbClr val="F5D4CC"/>
+                        <a:srgbClr val="F6DCD5"/>
                       </a:solidFill>
                       <a:prstDash val="solid"/>
                     </a:lnT>
                     <a:lnB w="9525" cap="flat" cmpd="sng" algn="ctr">
                       <a:solidFill>
-                        <a:srgbClr val="F5D4CC"/>
+                        <a:srgbClr val="F6DCD5"/>
                       </a:solidFill>
                       <a:prstDash val="solid"/>
                     </a:lnB>
                     <a:solidFill>
-                      <a:srgbClr val="FBF1EE"/>
+                      <a:srgbClr val="FBEFEC"/>
                     </a:solidFill>
                   </a:tcPr>
                 </a:tc>
@@ -7599,7 +7871,7 @@
     <p:bg>
       <p:bgPr>
         <a:solidFill>
-          <a:srgbClr val="FBF1EE"/>
+          <a:srgbClr val="FBEFEC"/>
         </a:solidFill>
         <a:effectLst/>
       </p:bgPr>
@@ -7618,18 +7890,82 @@
           <p:nvPr/>
         </p:nvSpPr>
         <p:spPr>
-          <a:xfrm rot="10800000">
-            <a:off x="10637215" y="0"/>
-            <a:ext cx="914400" cy="1554480"/>
-          </a:xfrm>
-          <a:prstGeom prst="round2SameRect">
-            <a:avLst>
-              <a:gd name="adj1" fmla="val 50000"/>
-              <a:gd name="adj2" fmla="val 0"/>
-            </a:avLst>
+          <a:xfrm>
+            <a:off x="10180015" y="-1645920"/>
+            <a:ext cx="3474720" cy="3474720"/>
+          </a:xfrm>
+          <a:prstGeom prst="ellipse">
+            <a:avLst/>
           </a:prstGeom>
           <a:solidFill>
-            <a:srgbClr val="F5D4CC"/>
+            <a:srgbClr val="EBBAAD"/>
+          </a:solidFill>
+          <a:ln>
+            <a:noFill/>
+          </a:ln>
+        </p:spPr>
+        <p:txBody>
+          <a:bodyPr rtlCol="0" anchor="ctr"/>
+          <a:lstStyle/>
+          <a:p>
+            <a:pPr algn="ctr"/>
+          </a:p>
+        </p:txBody>
+      </p:sp>
+      <p:sp>
+        <p:nvSpPr>
+          <p:cNvPr id="4" name="상단 라벨"/>
+          <p:cNvSpPr txBox="1"/>
+          <p:nvPr/>
+        </p:nvSpPr>
+        <p:spPr>
+          <a:xfrm>
+            <a:off x="640080" y="274320"/>
+            <a:ext cx="5486400" cy="274320"/>
+          </a:xfrm>
+          <a:prstGeom prst="rect">
+            <a:avLst/>
+          </a:prstGeom>
+          <a:noFill/>
+        </p:spPr>
+        <p:txBody>
+          <a:bodyPr wrap="square" lIns="54864" rIns="54864" tIns="27432" bIns="27432" anchor="ctr">
+            <a:noAutofit/>
+          </a:bodyPr>
+          <a:lstStyle/>
+          <a:p>
+            <a:pPr algn="l">
+              <a:lnSpc>
+                <a:spcPct val="115000"/>
+              </a:lnSpc>
+            </a:pPr>
+            <a:r>
+              <a:rPr sz="900" b="1" i="0" spc="250">
+                <a:solidFill>
+                  <a:srgbClr val="26231F"/>
+                </a:solidFill>
+              </a:rPr>
+              <a:t>INSURANCE CHECK</a:t>
+            </a:r>
+          </a:p>
+        </p:txBody>
+      </p:sp>
+      <p:sp>
+        <p:nvSpPr>
+          <p:cNvPr id="5" name="포인트"/>
+          <p:cNvSpPr/>
+          <p:nvPr/>
+        </p:nvSpPr>
+        <p:spPr>
+          <a:xfrm>
+            <a:off x="11048695" y="502919"/>
+            <a:ext cx="274320" cy="274320"/>
+          </a:xfrm>
+          <a:prstGeom prst="donut">
+            <a:avLst/>
+          </a:prstGeom>
+          <a:solidFill>
+            <a:srgbClr val="FFFFFF"/>
           </a:solidFill>
           <a:ln>
             <a:noFill/>
@@ -7655,8 +7991,8 @@
         </p:nvSpPr>
         <p:spPr>
           <a:xfrm>
-            <a:off x="640080" y="457200"/>
-            <a:ext cx="9722815" cy="868680"/>
+            <a:off x="640080" y="658368"/>
+            <a:ext cx="9082735" cy="868680"/>
           </a:xfrm>
         </p:spPr>
         <p:txBody>
@@ -7673,7 +8009,7 @@
             <a:r>
               <a:rPr sz="3000" b="1" i="0">
                 <a:solidFill>
-                  <a:srgbClr val="5B2315"/>
+                  <a:srgbClr val="26231F"/>
                 </a:solidFill>
               </a:rPr>
               <a:t>월 보험료 한눈에</a:t>
@@ -7683,26 +8019,26 @@
       </p:sp>
       <p:sp>
         <p:nvSpPr>
-          <p:cNvPr id="4" name="카드 1"/>
+          <p:cNvPr id="6" name="카드 1"/>
           <p:cNvSpPr/>
           <p:nvPr/>
         </p:nvSpPr>
         <p:spPr>
           <a:xfrm>
-            <a:off x="640080" y="1600200"/>
+            <a:off x="640080" y="1783080"/>
             <a:ext cx="3484778" cy="2926080"/>
           </a:xfrm>
           <a:prstGeom prst="roundRect">
             <a:avLst>
-              <a:gd name="adj" fmla="val 8000"/>
+              <a:gd name="adj" fmla="val 3000"/>
             </a:avLst>
           </a:prstGeom>
           <a:solidFill>
-            <a:srgbClr val="FBF1EE"/>
+            <a:srgbClr val="FFFFFF"/>
           </a:solidFill>
-          <a:ln w="15875">
+          <a:ln w="9525">
             <a:solidFill>
-              <a:srgbClr val="F5D4CC"/>
+              <a:srgbClr val="F6DCD5"/>
             </a:solidFill>
           </a:ln>
         </p:spPr>
@@ -7716,20 +8052,49 @@
       </p:sp>
       <p:sp>
         <p:nvSpPr>
-          <p:cNvPr id="5" name="번호 1"/>
+          <p:cNvPr id="7" name="위쪽 띠"/>
           <p:cNvSpPr/>
           <p:nvPr/>
         </p:nvSpPr>
         <p:spPr>
           <a:xfrm>
-            <a:off x="822959" y="1783080"/>
+            <a:off x="649224" y="1792224"/>
+            <a:ext cx="3466490" cy="82296"/>
+          </a:xfrm>
+          <a:prstGeom prst="rect">
+            <a:avLst/>
+          </a:prstGeom>
+          <a:solidFill>
+            <a:srgbClr val="D88C79"/>
+          </a:solidFill>
+          <a:ln>
+            <a:noFill/>
+          </a:ln>
+        </p:spPr>
+        <p:txBody>
+          <a:bodyPr rtlCol="0" anchor="ctr"/>
+          <a:lstStyle/>
+          <a:p>
+            <a:pPr algn="ctr"/>
+          </a:p>
+        </p:txBody>
+      </p:sp>
+      <p:sp>
+        <p:nvSpPr>
+          <p:cNvPr id="8" name="번호 1"/>
+          <p:cNvSpPr/>
+          <p:nvPr/>
+        </p:nvSpPr>
+        <p:spPr>
+          <a:xfrm>
+            <a:off x="822959" y="1965960"/>
             <a:ext cx="457200" cy="457200"/>
           </a:xfrm>
           <a:prstGeom prst="ellipse">
             <a:avLst/>
           </a:prstGeom>
           <a:solidFill>
-            <a:srgbClr val="AE4329"/>
+            <a:srgbClr val="E1C998"/>
           </a:solidFill>
           <a:ln>
             <a:noFill/>
@@ -7749,7 +8114,7 @@
             <a:r>
               <a:rPr sz="1600" b="1" i="0">
                 <a:solidFill>
-                  <a:srgbClr val="FFFFFF"/>
+                  <a:srgbClr val="26231F"/>
                 </a:solidFill>
               </a:rPr>
               <a:t>1</a:t>
@@ -7759,13 +8124,13 @@
       </p:sp>
       <p:sp>
         <p:nvSpPr>
-          <p:cNvPr id="6" name="TextBox 5"/>
+          <p:cNvPr id="9" name="TextBox 8"/>
           <p:cNvSpPr txBox="1"/>
           <p:nvPr/>
         </p:nvSpPr>
         <p:spPr>
           <a:xfrm>
-            <a:off x="777240" y="2377440"/>
+            <a:off x="777240" y="2560320"/>
             <a:ext cx="3210458" cy="640080"/>
           </a:xfrm>
           <a:prstGeom prst="rect">
@@ -7787,7 +8152,7 @@
             <a:r>
               <a:rPr sz="1700" b="1" i="0">
                 <a:solidFill>
-                  <a:srgbClr val="5B2315"/>
+                  <a:srgbClr val="492E27"/>
                 </a:solidFill>
               </a:rPr>
               <a:t>월 보험료 합계</a:t>
@@ -7797,13 +8162,13 @@
       </p:sp>
       <p:sp>
         <p:nvSpPr>
-          <p:cNvPr id="7" name="TextBox 6"/>
+          <p:cNvPr id="10" name="TextBox 9"/>
           <p:cNvSpPr txBox="1"/>
           <p:nvPr/>
         </p:nvSpPr>
         <p:spPr>
           <a:xfrm>
-            <a:off x="777240" y="3063240"/>
+            <a:off x="777240" y="3246120"/>
             <a:ext cx="3210458" cy="1325880"/>
           </a:xfrm>
           <a:prstGeom prst="rect">
@@ -7825,7 +8190,7 @@
             <a:r>
               <a:rPr sz="3000" b="0" i="0">
                 <a:solidFill>
-                  <a:srgbClr val="2B2B2B"/>
+                  <a:srgbClr val="26231F"/>
                 </a:solidFill>
               </a:rPr>
               <a:t>0원</a:t>
@@ -7835,26 +8200,26 @@
       </p:sp>
       <p:sp>
         <p:nvSpPr>
-          <p:cNvPr id="8" name="카드 2"/>
+          <p:cNvPr id="11" name="카드 2"/>
           <p:cNvSpPr/>
           <p:nvPr/>
         </p:nvSpPr>
         <p:spPr>
           <a:xfrm>
-            <a:off x="4353458" y="1600200"/>
+            <a:off x="4353458" y="1783080"/>
             <a:ext cx="3484778" cy="2926080"/>
           </a:xfrm>
           <a:prstGeom prst="roundRect">
             <a:avLst>
-              <a:gd name="adj" fmla="val 8000"/>
+              <a:gd name="adj" fmla="val 3000"/>
             </a:avLst>
           </a:prstGeom>
           <a:solidFill>
-            <a:srgbClr val="FBF1EE"/>
+            <a:srgbClr val="FFFFFF"/>
           </a:solidFill>
-          <a:ln w="15875">
+          <a:ln w="9525">
             <a:solidFill>
-              <a:srgbClr val="F5D4CC"/>
+              <a:srgbClr val="F6DCD5"/>
             </a:solidFill>
           </a:ln>
         </p:spPr>
@@ -7868,20 +8233,49 @@
       </p:sp>
       <p:sp>
         <p:nvSpPr>
-          <p:cNvPr id="9" name="번호 2"/>
+          <p:cNvPr id="12" name="위쪽 띠"/>
           <p:cNvSpPr/>
           <p:nvPr/>
         </p:nvSpPr>
         <p:spPr>
           <a:xfrm>
-            <a:off x="4536338" y="1783080"/>
+            <a:off x="4362602" y="1792224"/>
+            <a:ext cx="3466490" cy="82296"/>
+          </a:xfrm>
+          <a:prstGeom prst="rect">
+            <a:avLst/>
+          </a:prstGeom>
+          <a:solidFill>
+            <a:srgbClr val="D88C79"/>
+          </a:solidFill>
+          <a:ln>
+            <a:noFill/>
+          </a:ln>
+        </p:spPr>
+        <p:txBody>
+          <a:bodyPr rtlCol="0" anchor="ctr"/>
+          <a:lstStyle/>
+          <a:p>
+            <a:pPr algn="ctr"/>
+          </a:p>
+        </p:txBody>
+      </p:sp>
+      <p:sp>
+        <p:nvSpPr>
+          <p:cNvPr id="13" name="번호 2"/>
+          <p:cNvSpPr/>
+          <p:nvPr/>
+        </p:nvSpPr>
+        <p:spPr>
+          <a:xfrm>
+            <a:off x="4536338" y="1965960"/>
             <a:ext cx="457200" cy="457200"/>
           </a:xfrm>
           <a:prstGeom prst="ellipse">
             <a:avLst/>
           </a:prstGeom>
           <a:solidFill>
-            <a:srgbClr val="AE4329"/>
+            <a:srgbClr val="E1C998"/>
           </a:solidFill>
           <a:ln>
             <a:noFill/>
@@ -7901,7 +8295,7 @@
             <a:r>
               <a:rPr sz="1600" b="1" i="0">
                 <a:solidFill>
-                  <a:srgbClr val="FFFFFF"/>
+                  <a:srgbClr val="26231F"/>
                 </a:solidFill>
               </a:rPr>
               <a:t>2</a:t>
@@ -7911,13 +8305,13 @@
       </p:sp>
       <p:sp>
         <p:nvSpPr>
-          <p:cNvPr id="10" name="TextBox 9"/>
+          <p:cNvPr id="14" name="TextBox 13"/>
           <p:cNvSpPr txBox="1"/>
           <p:nvPr/>
         </p:nvSpPr>
         <p:spPr>
           <a:xfrm>
-            <a:off x="4490618" y="2377440"/>
+            <a:off x="4490618" y="2560320"/>
             <a:ext cx="3210458" cy="640080"/>
           </a:xfrm>
           <a:prstGeom prst="rect">
@@ -7939,7 +8333,7 @@
             <a:r>
               <a:rPr sz="1700" b="1" i="0">
                 <a:solidFill>
-                  <a:srgbClr val="5B2315"/>
+                  <a:srgbClr val="492E27"/>
                 </a:solidFill>
               </a:rPr>
               <a:t>연 보험료 합계</a:t>
@@ -7949,13 +8343,13 @@
       </p:sp>
       <p:sp>
         <p:nvSpPr>
-          <p:cNvPr id="11" name="TextBox 10"/>
+          <p:cNvPr id="15" name="TextBox 14"/>
           <p:cNvSpPr txBox="1"/>
           <p:nvPr/>
         </p:nvSpPr>
         <p:spPr>
           <a:xfrm>
-            <a:off x="4490618" y="3063240"/>
+            <a:off x="4490618" y="3246120"/>
             <a:ext cx="3210458" cy="1325880"/>
           </a:xfrm>
           <a:prstGeom prst="rect">
@@ -7977,7 +8371,7 @@
             <a:r>
               <a:rPr sz="3000" b="0" i="0">
                 <a:solidFill>
-                  <a:srgbClr val="2B2B2B"/>
+                  <a:srgbClr val="26231F"/>
                 </a:solidFill>
               </a:rPr>
               <a:t>0원</a:t>
@@ -7987,26 +8381,26 @@
       </p:sp>
       <p:sp>
         <p:nvSpPr>
-          <p:cNvPr id="12" name="카드 3"/>
+          <p:cNvPr id="16" name="카드 3"/>
           <p:cNvSpPr/>
           <p:nvPr/>
         </p:nvSpPr>
         <p:spPr>
           <a:xfrm>
-            <a:off x="8066836" y="1600200"/>
+            <a:off x="8066836" y="1783080"/>
             <a:ext cx="3484778" cy="2926080"/>
           </a:xfrm>
           <a:prstGeom prst="roundRect">
             <a:avLst>
-              <a:gd name="adj" fmla="val 8000"/>
+              <a:gd name="adj" fmla="val 3000"/>
             </a:avLst>
           </a:prstGeom>
           <a:solidFill>
-            <a:srgbClr val="FBF1EE"/>
+            <a:srgbClr val="FFFFFF"/>
           </a:solidFill>
-          <a:ln w="15875">
+          <a:ln w="9525">
             <a:solidFill>
-              <a:srgbClr val="F5D4CC"/>
+              <a:srgbClr val="F6DCD5"/>
             </a:solidFill>
           </a:ln>
         </p:spPr>
@@ -8020,20 +8414,49 @@
       </p:sp>
       <p:sp>
         <p:nvSpPr>
-          <p:cNvPr id="13" name="번호 3"/>
+          <p:cNvPr id="17" name="위쪽 띠"/>
           <p:cNvSpPr/>
           <p:nvPr/>
         </p:nvSpPr>
         <p:spPr>
           <a:xfrm>
-            <a:off x="8249716" y="1783080"/>
+            <a:off x="8075980" y="1792224"/>
+            <a:ext cx="3466490" cy="82296"/>
+          </a:xfrm>
+          <a:prstGeom prst="rect">
+            <a:avLst/>
+          </a:prstGeom>
+          <a:solidFill>
+            <a:srgbClr val="D88C79"/>
+          </a:solidFill>
+          <a:ln>
+            <a:noFill/>
+          </a:ln>
+        </p:spPr>
+        <p:txBody>
+          <a:bodyPr rtlCol="0" anchor="ctr"/>
+          <a:lstStyle/>
+          <a:p>
+            <a:pPr algn="ctr"/>
+          </a:p>
+        </p:txBody>
+      </p:sp>
+      <p:sp>
+        <p:nvSpPr>
+          <p:cNvPr id="18" name="번호 3"/>
+          <p:cNvSpPr/>
+          <p:nvPr/>
+        </p:nvSpPr>
+        <p:spPr>
+          <a:xfrm>
+            <a:off x="8249716" y="1965960"/>
             <a:ext cx="457200" cy="457200"/>
           </a:xfrm>
           <a:prstGeom prst="ellipse">
             <a:avLst/>
           </a:prstGeom>
           <a:solidFill>
-            <a:srgbClr val="AE4329"/>
+            <a:srgbClr val="E1C998"/>
           </a:solidFill>
           <a:ln>
             <a:noFill/>
@@ -8053,7 +8476,7 @@
             <a:r>
               <a:rPr sz="1600" b="1" i="0">
                 <a:solidFill>
-                  <a:srgbClr val="FFFFFF"/>
+                  <a:srgbClr val="26231F"/>
                 </a:solidFill>
               </a:rPr>
               <a:t>3</a:t>
@@ -8063,13 +8486,13 @@
       </p:sp>
       <p:sp>
         <p:nvSpPr>
-          <p:cNvPr id="14" name="TextBox 13"/>
+          <p:cNvPr id="19" name="TextBox 18"/>
           <p:cNvSpPr txBox="1"/>
           <p:nvPr/>
         </p:nvSpPr>
         <p:spPr>
           <a:xfrm>
-            <a:off x="8203996" y="2377440"/>
+            <a:off x="8203996" y="2560320"/>
             <a:ext cx="3210458" cy="640080"/>
           </a:xfrm>
           <a:prstGeom prst="rect">
@@ -8091,7 +8514,7 @@
             <a:r>
               <a:rPr sz="1700" b="1" i="0">
                 <a:solidFill>
-                  <a:srgbClr val="5B2315"/>
+                  <a:srgbClr val="492E27"/>
                 </a:solidFill>
               </a:rPr>
               <a:t>월 소득 대비</a:t>
@@ -8101,13 +8524,13 @@
       </p:sp>
       <p:sp>
         <p:nvSpPr>
-          <p:cNvPr id="15" name="TextBox 14"/>
+          <p:cNvPr id="20" name="TextBox 19"/>
           <p:cNvSpPr txBox="1"/>
           <p:nvPr/>
         </p:nvSpPr>
         <p:spPr>
           <a:xfrm>
-            <a:off x="8203996" y="3063240"/>
+            <a:off x="8203996" y="3246120"/>
             <a:ext cx="3210458" cy="1325880"/>
           </a:xfrm>
           <a:prstGeom prst="rect">
@@ -8129,7 +8552,7 @@
             <a:r>
               <a:rPr sz="3000" b="0" i="0">
                 <a:solidFill>
-                  <a:srgbClr val="2B2B2B"/>
+                  <a:srgbClr val="26231F"/>
                 </a:solidFill>
               </a:rPr>
               <a:t>0 %</a:t>
@@ -8139,13 +8562,13 @@
       </p:sp>
       <p:sp>
         <p:nvSpPr>
-          <p:cNvPr id="16" name="안내"/>
+          <p:cNvPr id="21" name="안내"/>
           <p:cNvSpPr txBox="1"/>
           <p:nvPr/>
         </p:nvSpPr>
         <p:spPr>
           <a:xfrm>
-            <a:off x="640080" y="4709160"/>
+            <a:off x="640080" y="4892040"/>
             <a:ext cx="10911535" cy="365760"/>
           </a:xfrm>
           <a:prstGeom prst="rect">
@@ -8189,7 +8612,7 @@
     <p:bg>
       <p:bgPr>
         <a:solidFill>
-          <a:srgbClr val="FBF1EE"/>
+          <a:srgbClr val="FBEFEC"/>
         </a:solidFill>
         <a:effectLst/>
       </p:bgPr>
@@ -8208,18 +8631,82 @@
           <p:nvPr/>
         </p:nvSpPr>
         <p:spPr>
-          <a:xfrm rot="10800000">
-            <a:off x="10637215" y="0"/>
-            <a:ext cx="914400" cy="1554480"/>
-          </a:xfrm>
-          <a:prstGeom prst="round2SameRect">
-            <a:avLst>
-              <a:gd name="adj1" fmla="val 50000"/>
-              <a:gd name="adj2" fmla="val 0"/>
-            </a:avLst>
+          <a:xfrm>
+            <a:off x="10180015" y="-1645920"/>
+            <a:ext cx="3474720" cy="3474720"/>
+          </a:xfrm>
+          <a:prstGeom prst="ellipse">
+            <a:avLst/>
           </a:prstGeom>
           <a:solidFill>
-            <a:srgbClr val="F5D4CC"/>
+            <a:srgbClr val="EBBAAD"/>
+          </a:solidFill>
+          <a:ln>
+            <a:noFill/>
+          </a:ln>
+        </p:spPr>
+        <p:txBody>
+          <a:bodyPr rtlCol="0" anchor="ctr"/>
+          <a:lstStyle/>
+          <a:p>
+            <a:pPr algn="ctr"/>
+          </a:p>
+        </p:txBody>
+      </p:sp>
+      <p:sp>
+        <p:nvSpPr>
+          <p:cNvPr id="4" name="상단 라벨"/>
+          <p:cNvSpPr txBox="1"/>
+          <p:nvPr/>
+        </p:nvSpPr>
+        <p:spPr>
+          <a:xfrm>
+            <a:off x="640080" y="274320"/>
+            <a:ext cx="5486400" cy="274320"/>
+          </a:xfrm>
+          <a:prstGeom prst="rect">
+            <a:avLst/>
+          </a:prstGeom>
+          <a:noFill/>
+        </p:spPr>
+        <p:txBody>
+          <a:bodyPr wrap="square" lIns="54864" rIns="54864" tIns="27432" bIns="27432" anchor="ctr">
+            <a:noAutofit/>
+          </a:bodyPr>
+          <a:lstStyle/>
+          <a:p>
+            <a:pPr algn="l">
+              <a:lnSpc>
+                <a:spcPct val="115000"/>
+              </a:lnSpc>
+            </a:pPr>
+            <a:r>
+              <a:rPr sz="900" b="1" i="0" spc="250">
+                <a:solidFill>
+                  <a:srgbClr val="26231F"/>
+                </a:solidFill>
+              </a:rPr>
+              <a:t>INSURANCE CHECK</a:t>
+            </a:r>
+          </a:p>
+        </p:txBody>
+      </p:sp>
+      <p:sp>
+        <p:nvSpPr>
+          <p:cNvPr id="5" name="포인트"/>
+          <p:cNvSpPr/>
+          <p:nvPr/>
+        </p:nvSpPr>
+        <p:spPr>
+          <a:xfrm>
+            <a:off x="11048695" y="502919"/>
+            <a:ext cx="274320" cy="274320"/>
+          </a:xfrm>
+          <a:prstGeom prst="donut">
+            <a:avLst/>
+          </a:prstGeom>
+          <a:solidFill>
+            <a:srgbClr val="FFFFFF"/>
           </a:solidFill>
           <a:ln>
             <a:noFill/>
@@ -8245,8 +8732,8 @@
         </p:nvSpPr>
         <p:spPr>
           <a:xfrm>
-            <a:off x="640080" y="457200"/>
-            <a:ext cx="9722815" cy="868680"/>
+            <a:off x="640080" y="658368"/>
+            <a:ext cx="9082735" cy="868680"/>
           </a:xfrm>
         </p:spPr>
         <p:txBody>
@@ -8263,7 +8750,7 @@
             <a:r>
               <a:rPr sz="3000" b="1" i="0">
                 <a:solidFill>
-                  <a:srgbClr val="5B2315"/>
+                  <a:srgbClr val="26231F"/>
                 </a:solidFill>
               </a:rPr>
               <a:t>점검 메모와 다음 할 일</a:t>
@@ -8273,26 +8760,26 @@
       </p:sp>
       <p:sp>
         <p:nvSpPr>
-          <p:cNvPr id="4" name="카드 1"/>
+          <p:cNvPr id="6" name="카드 1"/>
           <p:cNvSpPr/>
           <p:nvPr/>
         </p:nvSpPr>
         <p:spPr>
           <a:xfrm>
-            <a:off x="640080" y="1600200"/>
-            <a:ext cx="3484778" cy="4160520"/>
+            <a:off x="640080" y="1783080"/>
+            <a:ext cx="3484778" cy="3931920"/>
           </a:xfrm>
           <a:prstGeom prst="roundRect">
             <a:avLst>
-              <a:gd name="adj" fmla="val 8000"/>
+              <a:gd name="adj" fmla="val 3000"/>
             </a:avLst>
           </a:prstGeom>
           <a:solidFill>
-            <a:srgbClr val="FBF1EE"/>
+            <a:srgbClr val="FFFFFF"/>
           </a:solidFill>
-          <a:ln w="15875">
+          <a:ln w="9525">
             <a:solidFill>
-              <a:srgbClr val="F5D4CC"/>
+              <a:srgbClr val="F6DCD5"/>
             </a:solidFill>
           </a:ln>
         </p:spPr>
@@ -8306,20 +8793,49 @@
       </p:sp>
       <p:sp>
         <p:nvSpPr>
-          <p:cNvPr id="5" name="번호 1"/>
+          <p:cNvPr id="7" name="위쪽 띠"/>
           <p:cNvSpPr/>
           <p:nvPr/>
         </p:nvSpPr>
         <p:spPr>
           <a:xfrm>
-            <a:off x="822959" y="1783080"/>
+            <a:off x="649224" y="1792224"/>
+            <a:ext cx="3466490" cy="82296"/>
+          </a:xfrm>
+          <a:prstGeom prst="rect">
+            <a:avLst/>
+          </a:prstGeom>
+          <a:solidFill>
+            <a:srgbClr val="D88C79"/>
+          </a:solidFill>
+          <a:ln>
+            <a:noFill/>
+          </a:ln>
+        </p:spPr>
+        <p:txBody>
+          <a:bodyPr rtlCol="0" anchor="ctr"/>
+          <a:lstStyle/>
+          <a:p>
+            <a:pPr algn="ctr"/>
+          </a:p>
+        </p:txBody>
+      </p:sp>
+      <p:sp>
+        <p:nvSpPr>
+          <p:cNvPr id="8" name="번호 1"/>
+          <p:cNvSpPr/>
+          <p:nvPr/>
+        </p:nvSpPr>
+        <p:spPr>
+          <a:xfrm>
+            <a:off x="822959" y="1965960"/>
             <a:ext cx="457200" cy="457200"/>
           </a:xfrm>
           <a:prstGeom prst="ellipse">
             <a:avLst/>
           </a:prstGeom>
           <a:solidFill>
-            <a:srgbClr val="AE4329"/>
+            <a:srgbClr val="E1C998"/>
           </a:solidFill>
           <a:ln>
             <a:noFill/>
@@ -8339,7 +8855,7 @@
             <a:r>
               <a:rPr sz="1600" b="1" i="0">
                 <a:solidFill>
-                  <a:srgbClr val="FFFFFF"/>
+                  <a:srgbClr val="26231F"/>
                 </a:solidFill>
               </a:rPr>
               <a:t>1</a:t>
@@ -8349,13 +8865,13 @@
       </p:sp>
       <p:sp>
         <p:nvSpPr>
-          <p:cNvPr id="6" name="TextBox 5"/>
+          <p:cNvPr id="9" name="TextBox 8"/>
           <p:cNvSpPr txBox="1"/>
           <p:nvPr/>
         </p:nvSpPr>
         <p:spPr>
           <a:xfrm>
-            <a:off x="777240" y="2377440"/>
+            <a:off x="777240" y="2560320"/>
             <a:ext cx="3210458" cy="640080"/>
           </a:xfrm>
           <a:prstGeom prst="rect">
@@ -8377,7 +8893,7 @@
             <a:r>
               <a:rPr sz="1800" b="1" i="0">
                 <a:solidFill>
-                  <a:srgbClr val="5B2315"/>
+                  <a:srgbClr val="492E27"/>
                 </a:solidFill>
               </a:rPr>
               <a:t>확인할 것</a:t>
@@ -8387,14 +8903,14 @@
       </p:sp>
       <p:sp>
         <p:nvSpPr>
-          <p:cNvPr id="7" name="TextBox 6"/>
+          <p:cNvPr id="10" name="TextBox 9"/>
           <p:cNvSpPr txBox="1"/>
           <p:nvPr/>
         </p:nvSpPr>
         <p:spPr>
           <a:xfrm>
-            <a:off x="777240" y="3063240"/>
-            <a:ext cx="3210458" cy="2560320"/>
+            <a:off x="777240" y="3246120"/>
+            <a:ext cx="3210458" cy="2331720"/>
           </a:xfrm>
           <a:prstGeom prst="rect">
             <a:avLst/>
@@ -8415,7 +8931,7 @@
             <a:r>
               <a:rPr sz="1500" b="0" i="0">
                 <a:solidFill>
-                  <a:srgbClr val="2B2B2B"/>
+                  <a:srgbClr val="26231F"/>
                 </a:solidFill>
               </a:rPr>
               <a:t>내용을 입력하세요</a:t>
@@ -8425,26 +8941,26 @@
       </p:sp>
       <p:sp>
         <p:nvSpPr>
-          <p:cNvPr id="8" name="카드 2"/>
+          <p:cNvPr id="11" name="카드 2"/>
           <p:cNvSpPr/>
           <p:nvPr/>
         </p:nvSpPr>
         <p:spPr>
           <a:xfrm>
-            <a:off x="4353458" y="1600200"/>
-            <a:ext cx="3484778" cy="4160520"/>
+            <a:off x="4353458" y="1783080"/>
+            <a:ext cx="3484778" cy="3931920"/>
           </a:xfrm>
           <a:prstGeom prst="roundRect">
             <a:avLst>
-              <a:gd name="adj" fmla="val 8000"/>
+              <a:gd name="adj" fmla="val 3000"/>
             </a:avLst>
           </a:prstGeom>
           <a:solidFill>
-            <a:srgbClr val="FBF1EE"/>
+            <a:srgbClr val="FFFFFF"/>
           </a:solidFill>
-          <a:ln w="15875">
+          <a:ln w="9525">
             <a:solidFill>
-              <a:srgbClr val="F5D4CC"/>
+              <a:srgbClr val="F6DCD5"/>
             </a:solidFill>
           </a:ln>
         </p:spPr>
@@ -8458,20 +8974,49 @@
       </p:sp>
       <p:sp>
         <p:nvSpPr>
-          <p:cNvPr id="9" name="번호 2"/>
+          <p:cNvPr id="12" name="위쪽 띠"/>
           <p:cNvSpPr/>
           <p:nvPr/>
         </p:nvSpPr>
         <p:spPr>
           <a:xfrm>
-            <a:off x="4536338" y="1783080"/>
+            <a:off x="4362602" y="1792224"/>
+            <a:ext cx="3466490" cy="82296"/>
+          </a:xfrm>
+          <a:prstGeom prst="rect">
+            <a:avLst/>
+          </a:prstGeom>
+          <a:solidFill>
+            <a:srgbClr val="D88C79"/>
+          </a:solidFill>
+          <a:ln>
+            <a:noFill/>
+          </a:ln>
+        </p:spPr>
+        <p:txBody>
+          <a:bodyPr rtlCol="0" anchor="ctr"/>
+          <a:lstStyle/>
+          <a:p>
+            <a:pPr algn="ctr"/>
+          </a:p>
+        </p:txBody>
+      </p:sp>
+      <p:sp>
+        <p:nvSpPr>
+          <p:cNvPr id="13" name="번호 2"/>
+          <p:cNvSpPr/>
+          <p:nvPr/>
+        </p:nvSpPr>
+        <p:spPr>
+          <a:xfrm>
+            <a:off x="4536338" y="1965960"/>
             <a:ext cx="457200" cy="457200"/>
           </a:xfrm>
           <a:prstGeom prst="ellipse">
             <a:avLst/>
           </a:prstGeom>
           <a:solidFill>
-            <a:srgbClr val="AE4329"/>
+            <a:srgbClr val="E1C998"/>
           </a:solidFill>
           <a:ln>
             <a:noFill/>
@@ -8491,7 +9036,7 @@
             <a:r>
               <a:rPr sz="1600" b="1" i="0">
                 <a:solidFill>
-                  <a:srgbClr val="FFFFFF"/>
+                  <a:srgbClr val="26231F"/>
                 </a:solidFill>
               </a:rPr>
               <a:t>2</a:t>
@@ -8501,13 +9046,13 @@
       </p:sp>
       <p:sp>
         <p:nvSpPr>
-          <p:cNvPr id="10" name="TextBox 9"/>
+          <p:cNvPr id="14" name="TextBox 13"/>
           <p:cNvSpPr txBox="1"/>
           <p:nvPr/>
         </p:nvSpPr>
         <p:spPr>
           <a:xfrm>
-            <a:off x="4490618" y="2377440"/>
+            <a:off x="4490618" y="2560320"/>
             <a:ext cx="3210458" cy="640080"/>
           </a:xfrm>
           <a:prstGeom prst="rect">
@@ -8529,7 +9074,7 @@
             <a:r>
               <a:rPr sz="1800" b="1" i="0">
                 <a:solidFill>
-                  <a:srgbClr val="5B2315"/>
+                  <a:srgbClr val="492E27"/>
                 </a:solidFill>
               </a:rPr>
               <a:t>문의할 것</a:t>
@@ -8539,14 +9084,14 @@
       </p:sp>
       <p:sp>
         <p:nvSpPr>
-          <p:cNvPr id="11" name="TextBox 10"/>
+          <p:cNvPr id="15" name="TextBox 14"/>
           <p:cNvSpPr txBox="1"/>
           <p:nvPr/>
         </p:nvSpPr>
         <p:spPr>
           <a:xfrm>
-            <a:off x="4490618" y="3063240"/>
-            <a:ext cx="3210458" cy="2560320"/>
+            <a:off x="4490618" y="3246120"/>
+            <a:ext cx="3210458" cy="2331720"/>
           </a:xfrm>
           <a:prstGeom prst="rect">
             <a:avLst/>
@@ -8567,7 +9112,7 @@
             <a:r>
               <a:rPr sz="1500" b="0" i="0">
                 <a:solidFill>
-                  <a:srgbClr val="2B2B2B"/>
+                  <a:srgbClr val="26231F"/>
                 </a:solidFill>
               </a:rPr>
               <a:t>내용을 입력하세요</a:t>
@@ -8577,26 +9122,26 @@
       </p:sp>
       <p:sp>
         <p:nvSpPr>
-          <p:cNvPr id="12" name="카드 3"/>
+          <p:cNvPr id="16" name="카드 3"/>
           <p:cNvSpPr/>
           <p:nvPr/>
         </p:nvSpPr>
         <p:spPr>
           <a:xfrm>
-            <a:off x="8066836" y="1600200"/>
-            <a:ext cx="3484778" cy="4160520"/>
+            <a:off x="8066836" y="1783080"/>
+            <a:ext cx="3484778" cy="3931920"/>
           </a:xfrm>
           <a:prstGeom prst="roundRect">
             <a:avLst>
-              <a:gd name="adj" fmla="val 8000"/>
+              <a:gd name="adj" fmla="val 3000"/>
             </a:avLst>
           </a:prstGeom>
           <a:solidFill>
-            <a:srgbClr val="FBF1EE"/>
+            <a:srgbClr val="FFFFFF"/>
           </a:solidFill>
-          <a:ln w="15875">
+          <a:ln w="9525">
             <a:solidFill>
-              <a:srgbClr val="F5D4CC"/>
+              <a:srgbClr val="F6DCD5"/>
             </a:solidFill>
           </a:ln>
         </p:spPr>
@@ -8610,20 +9155,49 @@
       </p:sp>
       <p:sp>
         <p:nvSpPr>
-          <p:cNvPr id="13" name="번호 3"/>
+          <p:cNvPr id="17" name="위쪽 띠"/>
           <p:cNvSpPr/>
           <p:nvPr/>
         </p:nvSpPr>
         <p:spPr>
           <a:xfrm>
-            <a:off x="8249716" y="1783080"/>
+            <a:off x="8075980" y="1792224"/>
+            <a:ext cx="3466490" cy="82296"/>
+          </a:xfrm>
+          <a:prstGeom prst="rect">
+            <a:avLst/>
+          </a:prstGeom>
+          <a:solidFill>
+            <a:srgbClr val="D88C79"/>
+          </a:solidFill>
+          <a:ln>
+            <a:noFill/>
+          </a:ln>
+        </p:spPr>
+        <p:txBody>
+          <a:bodyPr rtlCol="0" anchor="ctr"/>
+          <a:lstStyle/>
+          <a:p>
+            <a:pPr algn="ctr"/>
+          </a:p>
+        </p:txBody>
+      </p:sp>
+      <p:sp>
+        <p:nvSpPr>
+          <p:cNvPr id="18" name="번호 3"/>
+          <p:cNvSpPr/>
+          <p:nvPr/>
+        </p:nvSpPr>
+        <p:spPr>
+          <a:xfrm>
+            <a:off x="8249716" y="1965960"/>
             <a:ext cx="457200" cy="457200"/>
           </a:xfrm>
           <a:prstGeom prst="ellipse">
             <a:avLst/>
           </a:prstGeom>
           <a:solidFill>
-            <a:srgbClr val="AE4329"/>
+            <a:srgbClr val="E1C998"/>
           </a:solidFill>
           <a:ln>
             <a:noFill/>
@@ -8643,7 +9217,7 @@
             <a:r>
               <a:rPr sz="1600" b="1" i="0">
                 <a:solidFill>
-                  <a:srgbClr val="FFFFFF"/>
+                  <a:srgbClr val="26231F"/>
                 </a:solidFill>
               </a:rPr>
               <a:t>3</a:t>
@@ -8653,13 +9227,13 @@
       </p:sp>
       <p:sp>
         <p:nvSpPr>
-          <p:cNvPr id="14" name="TextBox 13"/>
+          <p:cNvPr id="19" name="TextBox 18"/>
           <p:cNvSpPr txBox="1"/>
           <p:nvPr/>
         </p:nvSpPr>
         <p:spPr>
           <a:xfrm>
-            <a:off x="8203996" y="2377440"/>
+            <a:off x="8203996" y="2560320"/>
             <a:ext cx="3210458" cy="640080"/>
           </a:xfrm>
           <a:prstGeom prst="rect">
@@ -8681,7 +9255,7 @@
             <a:r>
               <a:rPr sz="1800" b="1" i="0">
                 <a:solidFill>
-                  <a:srgbClr val="5B2315"/>
+                  <a:srgbClr val="492E27"/>
                 </a:solidFill>
               </a:rPr>
               <a:t>정리할 날짜</a:t>
@@ -8691,14 +9265,14 @@
       </p:sp>
       <p:sp>
         <p:nvSpPr>
-          <p:cNvPr id="15" name="TextBox 14"/>
+          <p:cNvPr id="20" name="TextBox 19"/>
           <p:cNvSpPr txBox="1"/>
           <p:nvPr/>
         </p:nvSpPr>
         <p:spPr>
           <a:xfrm>
-            <a:off x="8203996" y="3063240"/>
-            <a:ext cx="3210458" cy="2560320"/>
+            <a:off x="8203996" y="3246120"/>
+            <a:ext cx="3210458" cy="2331720"/>
           </a:xfrm>
           <a:prstGeom prst="rect">
             <a:avLst/>
@@ -8719,7 +9293,7 @@
             <a:r>
               <a:rPr sz="1500" b="0" i="0">
                 <a:solidFill>
-                  <a:srgbClr val="2B2B2B"/>
+                  <a:srgbClr val="26231F"/>
                 </a:solidFill>
               </a:rPr>
               <a:t>내용을 입력하세요</a:t>
@@ -8729,13 +9303,13 @@
       </p:sp>
       <p:sp>
         <p:nvSpPr>
-          <p:cNvPr id="16" name="안내 문구"/>
+          <p:cNvPr id="21" name="안내 문구"/>
           <p:cNvSpPr txBox="1"/>
           <p:nvPr/>
         </p:nvSpPr>
         <p:spPr>
           <a:xfrm>
-            <a:off x="640080" y="5852160"/>
+            <a:off x="640080" y="5806440"/>
             <a:ext cx="10911535" cy="548640"/>
           </a:xfrm>
           <a:prstGeom prst="rect">
@@ -8784,34 +9358,34 @@
         <a:sysClr val="window" lastClr="FFFFFF"/>
       </a:lt1>
       <a:dk2>
-        <a:srgbClr val="5B2315"/>
+        <a:srgbClr val="492E27"/>
       </a:dk2>
       <a:lt2>
-        <a:srgbClr val="FBF1EE"/>
+        <a:srgbClr val="FBEFEC"/>
       </a:lt2>
       <a:accent1>
-        <a:srgbClr val="AE4329"/>
+        <a:srgbClr val="D88C79"/>
       </a:accent1>
       <a:accent2>
-        <a:srgbClr val="3B9177"/>
+        <a:srgbClr val="E1C998"/>
       </a:accent2>
       <a:accent3>
-        <a:srgbClr val="5B2315"/>
+        <a:srgbClr val="492E27"/>
       </a:accent3>
       <a:accent4>
-        <a:srgbClr val="F5D4CC"/>
+        <a:srgbClr val="F6DCD5"/>
       </a:accent4>
       <a:accent5>
-        <a:srgbClr val="746A50"/>
+        <a:srgbClr val="DCAA88"/>
       </a:accent5>
       <a:accent6>
-        <a:srgbClr val="9D7B73"/>
+        <a:srgbClr val="92827D"/>
       </a:accent6>
       <a:hlink>
-        <a:srgbClr val="AE4329"/>
+        <a:srgbClr val="D88C79"/>
       </a:hlink>
       <a:folHlink>
-        <a:srgbClr val="5B2315"/>
+        <a:srgbClr val="492E27"/>
       </a:folHlink>
     </a:clrScheme>
     <a:fontScheme name="Office">
